--- a/write/507-ppt/examples/collaboration-swiss.pptx
+++ b/write/507-ppt/examples/collaboration-swiss.pptx
@@ -4,15 +4,432 @@
   <p:sldMasterIdLst>
     <p:sldMasterId xmlns:r="http://schemas.openxmlformats.org/officeDocument/2006/relationships" id="2147483648" r:id="rId1"/>
   </p:sldMasterIdLst>
+  <p:notesMasterIdLst>
+    <p:notesMasterId r:id="Re22a7fbefea04f85"/>
+  </p:notesMasterIdLst>
   <p:sldIdLst>
-    <p:sldId id="256" r:id="R30c467c063374d28"/>
-    <p:sldId id="257" r:id="Rb4a1ea75ddbe4be3"/>
-    <p:sldId id="258" r:id="Rb37af36cd6b94bf8"/>
-    <p:sldId id="259" r:id="R66ee176babce4224"/>
+    <p:sldId id="256" r:id="Rc4f480b255c247a9"/>
+    <p:sldId id="257" r:id="Rebd67e0c5e8d4798"/>
+    <p:sldId id="258" r:id="R47bddeb985ee48c1"/>
+    <p:sldId id="259" r:id="R55d1a6c6e7bb48cc"/>
   </p:sldIdLst>
   <p:sldSz cx="12192000" cy="6858000"/>
   <p:notesSz cx="6858000" cy="9144000"/>
 </p:presentation>
+</file>
+
+<file path=ppt/notesMasters/notesMaster1.xml><?xml version="1.0" encoding="utf-8"?>
+<p:notesMaster xmlns:a="http://schemas.openxmlformats.org/drawingml/2006/main" xmlns:r="http://schemas.openxmlformats.org/officeDocument/2006/relationships" xmlns:p="http://schemas.openxmlformats.org/presentationml/2006/main">
+  <p:cSld>
+    <p:spTree>
+      <p:nvGrpSpPr>
+        <p:cNvPr id="1" name=""/>
+        <p:cNvGrpSpPr/>
+        <p:nvPr/>
+      </p:nvGrpSpPr>
+      <p:grpSpPr>
+        <a:xfrm>
+          <a:off x="0" y="0"/>
+          <a:ext cx="0" cy="0"/>
+          <a:chOff x="0" y="0"/>
+          <a:chExt cx="0" cy="0"/>
+        </a:xfrm>
+      </p:grpSpPr>
+      <p:sp>
+        <p:nvSpPr>
+          <p:cNvPr id="2" name="Header Placeholder 1"/>
+          <p:cNvSpPr>
+            <a:spLocks noGrp="1"/>
+          </p:cNvSpPr>
+          <p:nvPr>
+            <p:ph type="hdr" sz="quarter"/>
+          </p:nvPr>
+        </p:nvSpPr>
+        <p:spPr>
+          <a:xfrm>
+            <a:off x="0" y="0"/>
+            <a:ext cx="2971800" cy="458788"/>
+          </a:xfrm>
+          <a:prstGeom prst="rect">
+            <a:avLst/>
+          </a:prstGeom>
+        </p:spPr>
+        <p:txBody>
+          <a:bodyPr vert="horz" lIns="91440" tIns="45720" rIns="91440" bIns="45720"/>
+          <a:lstStyle>
+            <a:lvl1pPr algn="l">
+              <a:defRPr sz="1200"/>
+            </a:lvl1pPr>
+          </a:lstStyle>
+          <a:p>
+            <a:endParaRPr lang="en-US"/>
+          </a:p>
+        </p:txBody>
+      </p:sp>
+      <p:sp>
+        <p:nvSpPr>
+          <p:cNvPr id="3" name="Date Placeholder 2"/>
+          <p:cNvSpPr>
+            <a:spLocks noGrp="1"/>
+          </p:cNvSpPr>
+          <p:nvPr>
+            <p:ph type="dt" idx="1"/>
+          </p:nvPr>
+        </p:nvSpPr>
+        <p:spPr>
+          <a:xfrm>
+            <a:off x="3884613" y="0"/>
+            <a:ext cx="2971800" cy="458788"/>
+          </a:xfrm>
+          <a:prstGeom prst="rect">
+            <a:avLst/>
+          </a:prstGeom>
+        </p:spPr>
+        <p:txBody>
+          <a:bodyPr vert="horz" lIns="91440" tIns="45720" rIns="91440" bIns="45720"/>
+          <a:lstStyle>
+            <a:lvl1pPr algn="r">
+              <a:defRPr sz="1200"/>
+            </a:lvl1pPr>
+          </a:lstStyle>
+          <a:p>
+            <a:fld id="{B1E4B0A2-5C8E-4E5F-9C1D-2F3A4B5C6D71}" type="datetimeFigureOut">
+              <a:rPr lang="en-US"/>
+            </a:fld>
+            <a:endParaRPr lang="en-US"/>
+          </a:p>
+        </p:txBody>
+      </p:sp>
+      <p:sp>
+        <p:nvSpPr>
+          <p:cNvPr id="4" name="Slide Image Placeholder 3"/>
+          <p:cNvSpPr>
+            <a:spLocks noGrp="1" noRot="1" noChangeAspect="1"/>
+          </p:cNvSpPr>
+          <p:nvPr>
+            <p:ph type="sldImg" idx="2"/>
+          </p:nvPr>
+        </p:nvSpPr>
+        <p:spPr>
+          <a:xfrm>
+            <a:off x="1143000" y="685800"/>
+            <a:ext cx="4572000" cy="2571750"/>
+          </a:xfrm>
+          <a:prstGeom prst="rect">
+            <a:avLst/>
+          </a:prstGeom>
+          <a:noFill/>
+          <a:ln w="12700">
+            <a:solidFill>
+              <a:prstClr val="black"/>
+            </a:solidFill>
+          </a:ln>
+        </p:spPr>
+        <p:txBody>
+          <a:bodyPr/>
+          <a:lstStyle/>
+          <a:p>
+            <a:endParaRPr lang="en-US"/>
+          </a:p>
+        </p:txBody>
+      </p:sp>
+      <p:sp>
+        <p:nvSpPr>
+          <p:cNvPr id="5" name="Notes Placeholder 4"/>
+          <p:cNvSpPr>
+            <a:spLocks noGrp="1"/>
+          </p:cNvSpPr>
+          <p:nvPr>
+            <p:ph type="body" sz="quarter" idx="3"/>
+          </p:nvPr>
+        </p:nvSpPr>
+        <p:spPr>
+          <a:xfrm>
+            <a:off x="685800" y="3429000"/>
+            <a:ext cx="5486400" cy="4114800"/>
+          </a:xfrm>
+          <a:prstGeom prst="rect">
+            <a:avLst/>
+          </a:prstGeom>
+        </p:spPr>
+        <p:txBody>
+          <a:bodyPr vert="horz" lIns="91440" tIns="45720" rIns="91440" bIns="45720"/>
+          <a:lstStyle/>
+          <a:p>
+            <a:endParaRPr lang="en-US"/>
+          </a:p>
+        </p:txBody>
+      </p:sp>
+      <p:sp>
+        <p:nvSpPr>
+          <p:cNvPr id="6" name="Footer Placeholder 5"/>
+          <p:cNvSpPr>
+            <a:spLocks noGrp="1"/>
+          </p:cNvSpPr>
+          <p:nvPr>
+            <p:ph type="ftr" sz="quarter" idx="4"/>
+          </p:nvPr>
+        </p:nvSpPr>
+        <p:spPr>
+          <a:xfrm>
+            <a:off x="0" y="8685213"/>
+            <a:ext cx="2971800" cy="458787"/>
+          </a:xfrm>
+          <a:prstGeom prst="rect">
+            <a:avLst/>
+          </a:prstGeom>
+        </p:spPr>
+        <p:txBody>
+          <a:bodyPr vert="horz" lIns="91440" tIns="45720" rIns="91440" bIns="45720"/>
+          <a:lstStyle>
+            <a:lvl1pPr algn="l">
+              <a:defRPr sz="1200"/>
+            </a:lvl1pPr>
+          </a:lstStyle>
+          <a:p>
+            <a:endParaRPr lang="en-US"/>
+          </a:p>
+        </p:txBody>
+      </p:sp>
+      <p:sp>
+        <p:nvSpPr>
+          <p:cNvPr id="7" name="Slide Number Placeholder 6"/>
+          <p:cNvSpPr>
+            <a:spLocks noGrp="1"/>
+          </p:cNvSpPr>
+          <p:nvPr>
+            <p:ph type="sldNum" sz="quarter" idx="5"/>
+          </p:nvPr>
+        </p:nvSpPr>
+        <p:spPr>
+          <a:xfrm>
+            <a:off x="3884613" y="8685213"/>
+            <a:ext cx="2971800" cy="458787"/>
+          </a:xfrm>
+          <a:prstGeom prst="rect">
+            <a:avLst/>
+          </a:prstGeom>
+        </p:spPr>
+        <p:txBody>
+          <a:bodyPr vert="horz" lIns="91440" tIns="45720" rIns="91440" bIns="45720"/>
+          <a:lstStyle>
+            <a:lvl1pPr algn="r">
+              <a:defRPr sz="1200"/>
+            </a:lvl1pPr>
+          </a:lstStyle>
+          <a:p>
+            <a:fld id="{B1E4B0A2-5C8E-4E5F-9C1D-2F3A4B5C6D72}" type="slidenum">
+              <a:rPr lang="en-US"/>
+            </a:fld>
+            <a:endParaRPr lang="en-US"/>
+          </a:p>
+        </p:txBody>
+      </p:sp>
+    </p:spTree>
+  </p:cSld>
+  <p:clrMap bg1="lt1" tx1="dk1" bg2="lt2" tx2="dk2" accent1="accent1" accent2="accent2" accent3="accent3" accent4="accent4" accent5="accent5" accent6="accent6" hlink="hlink" folHlink="folHlink"/>
+  <p:notesStyle>
+    <a:lvl1pPr marL="0" algn="l" defTabSz="914400" rtl="0" eaLnBrk="1" latinLnBrk="0" hangingPunct="1">
+      <a:defRPr sz="1200" kern="1200">
+        <a:solidFill>
+          <a:schemeClr val="tx1"/>
+        </a:solidFill>
+        <a:latin typeface="+mn-lt"/>
+        <a:ea typeface="+mn-ea"/>
+        <a:cs typeface="+mn-cs"/>
+      </a:defRPr>
+    </a:lvl1pPr>
+    <a:lvl2pPr marL="457200" algn="l" defTabSz="914400" rtl="0" eaLnBrk="1" latinLnBrk="0" hangingPunct="1">
+      <a:defRPr sz="1200" kern="1200">
+        <a:solidFill>
+          <a:schemeClr val="tx1"/>
+        </a:solidFill>
+        <a:latin typeface="+mn-lt"/>
+        <a:ea typeface="+mn-ea"/>
+        <a:cs typeface="+mn-cs"/>
+      </a:defRPr>
+    </a:lvl2pPr>
+    <a:lvl3pPr marL="914400" algn="l" defTabSz="914400" rtl="0" eaLnBrk="1" latinLnBrk="0" hangingPunct="1">
+      <a:defRPr sz="1200" kern="1200">
+        <a:solidFill>
+          <a:schemeClr val="tx1"/>
+        </a:solidFill>
+        <a:latin typeface="+mn-lt"/>
+        <a:ea typeface="+mn-ea"/>
+        <a:cs typeface="+mn-cs"/>
+      </a:defRPr>
+    </a:lvl3pPr>
+    <a:lvl4pPr marL="1371600" algn="l" defTabSz="914400" rtl="0" eaLnBrk="1" latinLnBrk="0" hangingPunct="1">
+      <a:defRPr sz="1200" kern="1200">
+        <a:solidFill>
+          <a:schemeClr val="tx1"/>
+        </a:solidFill>
+        <a:latin typeface="+mn-lt"/>
+        <a:ea typeface="+mn-ea"/>
+        <a:cs typeface="+mn-cs"/>
+      </a:defRPr>
+    </a:lvl4pPr>
+    <a:lvl5pPr marL="1828800" algn="l" defTabSz="914400" rtl="0" eaLnBrk="1" latinLnBrk="0" hangingPunct="1">
+      <a:defRPr sz="1200" kern="1200">
+        <a:solidFill>
+          <a:schemeClr val="tx1"/>
+        </a:solidFill>
+        <a:latin typeface="+mn-lt"/>
+        <a:ea typeface="+mn-ea"/>
+        <a:cs typeface="+mn-cs"/>
+      </a:defRPr>
+    </a:lvl5pPr>
+    <a:lvl6pPr marL="2286000" algn="l" defTabSz="914400" rtl="0" eaLnBrk="1" latinLnBrk="0" hangingPunct="1">
+      <a:defRPr sz="1200" kern="1200">
+        <a:solidFill>
+          <a:schemeClr val="tx1"/>
+        </a:solidFill>
+        <a:latin typeface="+mn-lt"/>
+        <a:ea typeface="+mn-ea"/>
+        <a:cs typeface="+mn-cs"/>
+      </a:defRPr>
+    </a:lvl6pPr>
+    <a:lvl7pPr marL="2743200" algn="l" defTabSz="914400" rtl="0" eaLnBrk="1" latinLnBrk="0" hangingPunct="1">
+      <a:defRPr sz="1200" kern="1200">
+        <a:solidFill>
+          <a:schemeClr val="tx1"/>
+        </a:solidFill>
+        <a:latin typeface="+mn-lt"/>
+        <a:ea typeface="+mn-ea"/>
+        <a:cs typeface="+mn-cs"/>
+      </a:defRPr>
+    </a:lvl7pPr>
+    <a:lvl8pPr marL="3200400" algn="l" defTabSz="914400" rtl="0" eaLnBrk="1" latinLnBrk="0" hangingPunct="1">
+      <a:defRPr sz="1200" kern="1200">
+        <a:solidFill>
+          <a:schemeClr val="tx1"/>
+        </a:solidFill>
+        <a:latin typeface="+mn-lt"/>
+        <a:ea typeface="+mn-ea"/>
+        <a:cs typeface="+mn-cs"/>
+      </a:defRPr>
+    </a:lvl8pPr>
+    <a:lvl9pPr marL="3657600" algn="l" defTabSz="914400" rtl="0" eaLnBrk="1" latinLnBrk="0" hangingPunct="1">
+      <a:defRPr sz="1200" kern="1200">
+        <a:solidFill>
+          <a:schemeClr val="tx1"/>
+        </a:solidFill>
+        <a:latin typeface="+mn-lt"/>
+        <a:ea typeface="+mn-ea"/>
+        <a:cs typeface="+mn-cs"/>
+      </a:defRPr>
+    </a:lvl9pPr>
+  </p:notesStyle>
+</p:notesMaster>
+</file>
+
+<file path=ppt/notesMasters/theme/theme2.xml><?xml version="1.0" encoding="utf-8"?>
+<a:theme xmlns:a="http://schemas.openxmlformats.org/drawingml/2006/main" name="Office Theme">
+  <a:themeElements>
+    <a:clrScheme name="Office">
+      <a:dk1>
+        <a:sysClr val="windowText" lastClr="000000"/>
+      </a:dk1>
+      <a:lt1>
+        <a:sysClr val="window" lastClr="FFFFFF"/>
+      </a:lt1>
+      <a:dk2>
+        <a:srgbClr val="44546A"/>
+      </a:dk2>
+      <a:lt2>
+        <a:srgbClr val="E7E6E6"/>
+      </a:lt2>
+      <a:accent1>
+        <a:srgbClr val="4472C4"/>
+      </a:accent1>
+      <a:accent2>
+        <a:srgbClr val="ED7D31"/>
+      </a:accent2>
+      <a:accent3>
+        <a:srgbClr val="A5A5A5"/>
+      </a:accent3>
+      <a:accent4>
+        <a:srgbClr val="FFC000"/>
+      </a:accent4>
+      <a:accent5>
+        <a:srgbClr val="5B9BD5"/>
+      </a:accent5>
+      <a:accent6>
+        <a:srgbClr val="70AD47"/>
+      </a:accent6>
+      <a:hlink>
+        <a:srgbClr val="0563C1"/>
+      </a:hlink>
+      <a:folHlink>
+        <a:srgbClr val="954F72"/>
+      </a:folHlink>
+    </a:clrScheme>
+    <a:fontScheme name="Office">
+      <a:majorFont>
+        <a:latin typeface="Calibri Light"/>
+        <a:ea typeface="等线"/>
+        <a:cs typeface=""/>
+      </a:majorFont>
+      <a:minorFont>
+        <a:latin typeface="Calibri"/>
+        <a:ea typeface="等线"/>
+        <a:cs typeface=""/>
+      </a:minorFont>
+    </a:fontScheme>
+    <a:fmtScheme name="Office">
+      <a:fillStyleLst>
+        <a:solidFill>
+          <a:schemeClr val="phClr"/>
+        </a:solidFill>
+        <a:solidFill>
+          <a:schemeClr val="phClr"/>
+        </a:solidFill>
+        <a:solidFill>
+          <a:schemeClr val="phClr"/>
+        </a:solidFill>
+      </a:fillStyleLst>
+      <a:lnStyleLst>
+        <a:ln w="6350" cap="flat">
+          <a:solidFill>
+            <a:schemeClr val="phClr"/>
+          </a:solidFill>
+        </a:ln>
+        <a:ln w="12700" cap="flat">
+          <a:solidFill>
+            <a:schemeClr val="phClr"/>
+          </a:solidFill>
+        </a:ln>
+        <a:ln w="19050" cap="flat">
+          <a:solidFill>
+            <a:schemeClr val="phClr"/>
+          </a:solidFill>
+        </a:ln>
+      </a:lnStyleLst>
+      <a:effectStyleLst>
+        <a:effectStyle>
+          <a:effectLst/>
+        </a:effectStyle>
+        <a:effectStyle>
+          <a:effectLst/>
+        </a:effectStyle>
+        <a:effectStyle>
+          <a:effectLst/>
+        </a:effectStyle>
+      </a:effectStyleLst>
+      <a:bgFillStyleLst>
+        <a:solidFill>
+          <a:schemeClr val="phClr"/>
+        </a:solidFill>
+        <a:solidFill>
+          <a:schemeClr val="phClr"/>
+        </a:solidFill>
+        <a:solidFill>
+          <a:schemeClr val="phClr"/>
+        </a:solidFill>
+      </a:bgFillStyleLst>
+    </a:fmtScheme>
+  </a:themeElements>
+</a:theme>
 </file>
 
 <file path=ppt/notesSlides/notesSlide1.xml><?xml version="1.0" encoding="utf-8"?>
@@ -64,6 +481,9 @@
       </p:sp>
     </p:spTree>
   </p:cSld>
+  <p:clrMapOvr>
+    <a:masterClrMapping xmlns:a="http://schemas.openxmlformats.org/drawingml/2006/main"/>
+  </p:clrMapOvr>
 </p:notes>
 </file>
 
@@ -116,6 +536,9 @@
       </p:sp>
     </p:spTree>
   </p:cSld>
+  <p:clrMapOvr>
+    <a:masterClrMapping xmlns:a="http://schemas.openxmlformats.org/drawingml/2006/main"/>
+  </p:clrMapOvr>
 </p:notes>
 </file>
 
@@ -168,6 +591,9 @@
       </p:sp>
     </p:spTree>
   </p:cSld>
+  <p:clrMapOvr>
+    <a:masterClrMapping xmlns:a="http://schemas.openxmlformats.org/drawingml/2006/main"/>
+  </p:clrMapOvr>
 </p:notes>
 </file>
 
@@ -220,6 +646,9 @@
       </p:sp>
     </p:spTree>
   </p:cSld>
+  <p:clrMapOvr>
+    <a:masterClrMapping xmlns:a="http://schemas.openxmlformats.org/drawingml/2006/main"/>
+  </p:clrMapOvr>
 </p:notes>
 </file>
 
@@ -539,7 +968,7 @@
         <p:spPr>
           <a:xfrm xmlns:a="http://schemas.openxmlformats.org/drawingml/2006/main">
             <a:off x="360000" y="180000"/>
-            <a:ext cx="2880000" cy="414000"/>
+            <a:ext cx="5760000" cy="414000"/>
           </a:xfrm>
           <a:prstGeom xmlns:a="http://schemas.openxmlformats.org/drawingml/2006/main" prst="rect">
             <a:avLst/>
@@ -557,7 +986,7 @@
                 <a:latin typeface="Menlo"/>
                 <a:ea typeface="Menlo"/>
               </a:rPr>
-              <a:t>《协作练习》 · 第一节</a:t>
+              <a:t>从会用到会协作</a:t>
             </a:r>
           </a:p>
         </p:txBody>
@@ -618,73 +1047,73 @@
                 <a:solidFill>
                   <a:srgbClr val="002FA7"/>
                 </a:solidFill>
+                <a:latin typeface="Menlo"/>
+                <a:ea typeface="Menlo"/>
+              </a:rPr>
+              <a:t>关于协作，先说一件最重要的事</a:t>
+            </a:r>
+          </a:p>
+        </p:txBody>
+      </p:sp>
+      <p:sp>
+        <p:nvSpPr>
+          <p:cNvPr id="100003" name="TextBox 4"/>
+          <p:cNvSpPr txBox="1"/>
+          <p:nvPr/>
+        </p:nvSpPr>
+        <p:spPr>
+          <a:xfrm xmlns:a="http://schemas.openxmlformats.org/drawingml/2006/main">
+            <a:off x="360000" y="1872000"/>
+            <a:ext cx="8280000" cy="972000"/>
+          </a:xfrm>
+          <a:prstGeom xmlns:a="http://schemas.openxmlformats.org/drawingml/2006/main" prst="rect">
+            <a:avLst/>
+          </a:prstGeom>
+        </p:spPr>
+        <p:txBody>
+          <a:bodyPr xmlns:a="http://schemas.openxmlformats.org/drawingml/2006/main"/>
+          <a:lstStyle xmlns:a="http://schemas.openxmlformats.org/drawingml/2006/main"/>
+          <a:p xmlns:a="http://schemas.openxmlformats.org/drawingml/2006/main">
+            <a:r>
+              <a:rPr lang="en-US" sz="4800" b="1">
+                <a:solidFill>
+                  <a:srgbClr val="111111"/>
+                </a:solidFill>
                 <a:latin typeface="Helvetica"/>
                 <a:ea typeface="PingFang SC"/>
               </a:rPr>
-              <a:t>关于协作，先说一件最重要的事</a:t>
-            </a:r>
-          </a:p>
-        </p:txBody>
-      </p:sp>
-      <p:sp>
-        <p:nvSpPr>
-          <p:cNvPr id="100003" name="TextBox 4"/>
-          <p:cNvSpPr txBox="1"/>
-          <p:nvPr/>
-        </p:nvSpPr>
-        <p:spPr>
-          <a:xfrm xmlns:a="http://schemas.openxmlformats.org/drawingml/2006/main">
-            <a:off x="360000" y="1872000"/>
-            <a:ext cx="8280000" cy="972000"/>
-          </a:xfrm>
-          <a:prstGeom xmlns:a="http://schemas.openxmlformats.org/drawingml/2006/main" prst="rect">
-            <a:avLst/>
-          </a:prstGeom>
-        </p:spPr>
-        <p:txBody>
-          <a:bodyPr xmlns:a="http://schemas.openxmlformats.org/drawingml/2006/main"/>
-          <a:lstStyle xmlns:a="http://schemas.openxmlformats.org/drawingml/2006/main"/>
-          <a:p xmlns:a="http://schemas.openxmlformats.org/drawingml/2006/main">
-            <a:r>
-              <a:rPr lang="en-US" sz="4800" b="1">
+              <a:t>从会用到会协作</a:t>
+            </a:r>
+          </a:p>
+        </p:txBody>
+      </p:sp>
+      <p:sp>
+        <p:nvSpPr>
+          <p:cNvPr id="100004" name="TextBox 5"/>
+          <p:cNvSpPr txBox="1"/>
+          <p:nvPr/>
+        </p:nvSpPr>
+        <p:spPr>
+          <a:xfrm xmlns:a="http://schemas.openxmlformats.org/drawingml/2006/main">
+            <a:off x="360000" y="2880000"/>
+            <a:ext cx="6480000" cy="576000"/>
+          </a:xfrm>
+          <a:prstGeom xmlns:a="http://schemas.openxmlformats.org/drawingml/2006/main" prst="rect">
+            <a:avLst/>
+          </a:prstGeom>
+        </p:spPr>
+        <p:txBody>
+          <a:bodyPr xmlns:a="http://schemas.openxmlformats.org/drawingml/2006/main"/>
+          <a:lstStyle xmlns:a="http://schemas.openxmlformats.org/drawingml/2006/main"/>
+          <a:p xmlns:a="http://schemas.openxmlformats.org/drawingml/2006/main">
+            <a:r>
+              <a:rPr lang="en-US" sz="2300">
                 <a:solidFill>
                   <a:srgbClr val="111111"/>
                 </a:solidFill>
                 <a:latin typeface="Helvetica"/>
                 <a:ea typeface="PingFang SC"/>
               </a:rPr>
-              <a:t>从会用到会协作</a:t>
-            </a:r>
-          </a:p>
-        </p:txBody>
-      </p:sp>
-      <p:sp>
-        <p:nvSpPr>
-          <p:cNvPr id="100004" name="TextBox 5"/>
-          <p:cNvSpPr txBox="1"/>
-          <p:nvPr/>
-        </p:nvSpPr>
-        <p:spPr>
-          <a:xfrm xmlns:a="http://schemas.openxmlformats.org/drawingml/2006/main">
-            <a:off x="360000" y="2880000"/>
-            <a:ext cx="6480000" cy="576000"/>
-          </a:xfrm>
-          <a:prstGeom xmlns:a="http://schemas.openxmlformats.org/drawingml/2006/main" prst="rect">
-            <a:avLst/>
-          </a:prstGeom>
-        </p:spPr>
-        <p:txBody>
-          <a:bodyPr xmlns:a="http://schemas.openxmlformats.org/drawingml/2006/main"/>
-          <a:lstStyle xmlns:a="http://schemas.openxmlformats.org/drawingml/2006/main"/>
-          <a:p xmlns:a="http://schemas.openxmlformats.org/drawingml/2006/main">
-            <a:r>
-              <a:rPr lang="en-US" sz="2300">
-                <a:solidFill>
-                  <a:srgbClr val="111111"/>
-                </a:solidFill>
-                <a:latin typeface="Helvetica"/>
-                <a:ea typeface="PingFang SC"/>
-              </a:rPr>
               <a:t>让 AI 帮你把想法做出来</a:t>
             </a:r>
           </a:p>
@@ -699,7 +1128,7 @@
         <p:spPr>
           <a:xfrm xmlns:a="http://schemas.openxmlformats.org/drawingml/2006/main">
             <a:off x="360000" y="5112000"/>
-            <a:ext cx="2880000" cy="414000"/>
+            <a:ext cx="4320000" cy="414000"/>
           </a:xfrm>
           <a:prstGeom xmlns:a="http://schemas.openxmlformats.org/drawingml/2006/main" prst="rect">
             <a:avLst/>
@@ -753,7 +1182,7 @@
         <p:spPr>
           <a:xfrm xmlns:a="http://schemas.openxmlformats.org/drawingml/2006/main">
             <a:off x="360000" y="180000"/>
-            <a:ext cx="2880000" cy="414000"/>
+            <a:ext cx="5760000" cy="414000"/>
           </a:xfrm>
           <a:prstGeom xmlns:a="http://schemas.openxmlformats.org/drawingml/2006/main" prst="rect">
             <a:avLst/>
@@ -771,7 +1200,7 @@
                 <a:latin typeface="Menlo"/>
                 <a:ea typeface="Menlo"/>
               </a:rPr>
-              <a:t>《协作练习》 · 第一节</a:t>
+              <a:t>从会用到会协作</a:t>
             </a:r>
           </a:p>
         </p:txBody>
@@ -817,7 +1246,7 @@
         <p:spPr>
           <a:xfrm xmlns:a="http://schemas.openxmlformats.org/drawingml/2006/main">
             <a:off x="360000" y="1080000"/>
-            <a:ext cx="2160000" cy="468000"/>
+            <a:ext cx="3600000" cy="468000"/>
           </a:xfrm>
           <a:prstGeom xmlns:a="http://schemas.openxmlformats.org/drawingml/2006/main" prst="rect">
             <a:avLst/>
@@ -832,8 +1261,8 @@
                 <a:solidFill>
                   <a:srgbClr val="002FA7"/>
                 </a:solidFill>
-                <a:latin typeface="Helvetica"/>
-                <a:ea typeface="PingFang SC"/>
+                <a:latin typeface="Menlo"/>
+                <a:ea typeface="Menlo"/>
               </a:rPr>
               <a:t>执行环境</a:t>
             </a:r>
@@ -913,10 +1342,10 @@
           <p:nvPr/>
         </p:nvPicPr>
         <p:blipFill>
-          <a:blip xmlns:r="http://schemas.openxmlformats.org/officeDocument/2006/relationships" xmlns:a="http://schemas.openxmlformats.org/drawingml/2006/main" r:embed="R189761c6c2294896">
+          <a:blip xmlns:r="http://schemas.openxmlformats.org/officeDocument/2006/relationships" xmlns:a="http://schemas.openxmlformats.org/drawingml/2006/main" r:embed="Rc02fc022c374489e">
             <a:extLst>
               <a:ext uri="{96DAC541-7B7A-43D3-8B79-37D633B846F1}">
-                <asvg:svgBlip xmlns:asvg="http://schemas.microsoft.com/office/drawing/2016/SVG/main" r:embed="R1dc86252417f4f5c"/>
+                <asvg:svgBlip xmlns:asvg="http://schemas.microsoft.com/office/drawing/2016/SVG/main" r:embed="Rcba9f3c7961a4eb6"/>
               </a:ext>
             </a:extLst>
           </a:blip>
@@ -997,7 +1426,7 @@
         <p:spPr>
           <a:xfrm xmlns:a="http://schemas.openxmlformats.org/drawingml/2006/main">
             <a:off x="360000" y="180000"/>
-            <a:ext cx="2880000" cy="414000"/>
+            <a:ext cx="5760000" cy="414000"/>
           </a:xfrm>
           <a:prstGeom xmlns:a="http://schemas.openxmlformats.org/drawingml/2006/main" prst="rect">
             <a:avLst/>
@@ -1015,7 +1444,7 @@
                 <a:latin typeface="Menlo"/>
                 <a:ea typeface="Menlo"/>
               </a:rPr>
-              <a:t>《协作练习》 · 第一节</a:t>
+              <a:t>从会用到会协作</a:t>
             </a:r>
           </a:p>
         </p:txBody>
@@ -1061,7 +1490,7 @@
         <p:spPr>
           <a:xfrm xmlns:a="http://schemas.openxmlformats.org/drawingml/2006/main">
             <a:off x="360000" y="900000"/>
-            <a:ext cx="7560000" cy="720000"/>
+            <a:ext cx="8640000" cy="720000"/>
           </a:xfrm>
           <a:prstGeom xmlns:a="http://schemas.openxmlformats.org/drawingml/2006/main" prst="rect">
             <a:avLst/>
@@ -1092,19 +1521,19 @@
         </p:nvSpPr>
         <p:spPr>
           <a:xfrm xmlns:a="http://schemas.openxmlformats.org/drawingml/2006/main">
-            <a:off x="360000" y="1980000"/>
-            <a:ext cx="2592000" cy="792000"/>
-          </a:xfrm>
-          <a:prstGeom xmlns:a="http://schemas.openxmlformats.org/drawingml/2006/main" prst="rect">
-            <a:avLst/>
-          </a:prstGeom>
-        </p:spPr>
-        <p:txBody>
-          <a:bodyPr xmlns:a="http://schemas.openxmlformats.org/drawingml/2006/main"/>
-          <a:lstStyle xmlns:a="http://schemas.openxmlformats.org/drawingml/2006/main"/>
-          <a:p xmlns:a="http://schemas.openxmlformats.org/drawingml/2006/main">
-            <a:r>
-              <a:rPr lang="en-US" sz="4000" b="1">
+            <a:off x="360000" y="1872000"/>
+            <a:ext cx="2688001" cy="684000"/>
+          </a:xfrm>
+          <a:prstGeom xmlns:a="http://schemas.openxmlformats.org/drawingml/2006/main" prst="rect">
+            <a:avLst/>
+          </a:prstGeom>
+        </p:spPr>
+        <p:txBody>
+          <a:bodyPr xmlns:a="http://schemas.openxmlformats.org/drawingml/2006/main"/>
+          <a:lstStyle xmlns:a="http://schemas.openxmlformats.org/drawingml/2006/main"/>
+          <a:p xmlns:a="http://schemas.openxmlformats.org/drawingml/2006/main">
+            <a:r>
+              <a:rPr lang="en-US" sz="2600" b="1">
                 <a:solidFill>
                   <a:srgbClr val="002FA7"/>
                 </a:solidFill>
@@ -1124,19 +1553,19 @@
         </p:nvSpPr>
         <p:spPr>
           <a:xfrm xmlns:a="http://schemas.openxmlformats.org/drawingml/2006/main">
-            <a:off x="360000" y="2808000"/>
-            <a:ext cx="2592000" cy="1044000"/>
-          </a:xfrm>
-          <a:prstGeom xmlns:a="http://schemas.openxmlformats.org/drawingml/2006/main" prst="rect">
-            <a:avLst/>
-          </a:prstGeom>
-        </p:spPr>
-        <p:txBody>
-          <a:bodyPr xmlns:a="http://schemas.openxmlformats.org/drawingml/2006/main"/>
-          <a:lstStyle xmlns:a="http://schemas.openxmlformats.org/drawingml/2006/main"/>
-          <a:p xmlns:a="http://schemas.openxmlformats.org/drawingml/2006/main">
-            <a:r>
-              <a:rPr lang="en-US" sz="1800">
+            <a:off x="360000" y="2628000"/>
+            <a:ext cx="2688001" cy="1188000"/>
+          </a:xfrm>
+          <a:prstGeom xmlns:a="http://schemas.openxmlformats.org/drawingml/2006/main" prst="rect">
+            <a:avLst/>
+          </a:prstGeom>
+        </p:spPr>
+        <p:txBody>
+          <a:bodyPr xmlns:a="http://schemas.openxmlformats.org/drawingml/2006/main"/>
+          <a:lstStyle xmlns:a="http://schemas.openxmlformats.org/drawingml/2006/main"/>
+          <a:p xmlns:a="http://schemas.openxmlformats.org/drawingml/2006/main">
+            <a:r>
+              <a:rPr lang="en-US" sz="1700">
                 <a:solidFill>
                   <a:srgbClr val="111111"/>
                 </a:solidFill>
@@ -1156,19 +1585,19 @@
         </p:nvSpPr>
         <p:spPr>
           <a:xfrm xmlns:a="http://schemas.openxmlformats.org/drawingml/2006/main">
-            <a:off x="3600000" y="1980000"/>
-            <a:ext cx="2592000" cy="792000"/>
-          </a:xfrm>
-          <a:prstGeom xmlns:a="http://schemas.openxmlformats.org/drawingml/2006/main" prst="rect">
-            <a:avLst/>
-          </a:prstGeom>
-        </p:spPr>
-        <p:txBody>
-          <a:bodyPr xmlns:a="http://schemas.openxmlformats.org/drawingml/2006/main"/>
-          <a:lstStyle xmlns:a="http://schemas.openxmlformats.org/drawingml/2006/main"/>
-          <a:p xmlns:a="http://schemas.openxmlformats.org/drawingml/2006/main">
-            <a:r>
-              <a:rPr lang="en-US" sz="4000" b="1">
+            <a:off x="3336001" y="1872000"/>
+            <a:ext cx="2688001" cy="684000"/>
+          </a:xfrm>
+          <a:prstGeom xmlns:a="http://schemas.openxmlformats.org/drawingml/2006/main" prst="rect">
+            <a:avLst/>
+          </a:prstGeom>
+        </p:spPr>
+        <p:txBody>
+          <a:bodyPr xmlns:a="http://schemas.openxmlformats.org/drawingml/2006/main"/>
+          <a:lstStyle xmlns:a="http://schemas.openxmlformats.org/drawingml/2006/main"/>
+          <a:p xmlns:a="http://schemas.openxmlformats.org/drawingml/2006/main">
+            <a:r>
+              <a:rPr lang="en-US" sz="2600" b="1">
                 <a:solidFill>
                   <a:srgbClr val="002FA7"/>
                 </a:solidFill>
@@ -1188,19 +1617,19 @@
         </p:nvSpPr>
         <p:spPr>
           <a:xfrm xmlns:a="http://schemas.openxmlformats.org/drawingml/2006/main">
-            <a:off x="3600000" y="2808000"/>
-            <a:ext cx="2592000" cy="1044000"/>
-          </a:xfrm>
-          <a:prstGeom xmlns:a="http://schemas.openxmlformats.org/drawingml/2006/main" prst="rect">
-            <a:avLst/>
-          </a:prstGeom>
-        </p:spPr>
-        <p:txBody>
-          <a:bodyPr xmlns:a="http://schemas.openxmlformats.org/drawingml/2006/main"/>
-          <a:lstStyle xmlns:a="http://schemas.openxmlformats.org/drawingml/2006/main"/>
-          <a:p xmlns:a="http://schemas.openxmlformats.org/drawingml/2006/main">
-            <a:r>
-              <a:rPr lang="en-US" sz="1800">
+            <a:off x="3336001" y="2628000"/>
+            <a:ext cx="2688001" cy="1188000"/>
+          </a:xfrm>
+          <a:prstGeom xmlns:a="http://schemas.openxmlformats.org/drawingml/2006/main" prst="rect">
+            <a:avLst/>
+          </a:prstGeom>
+        </p:spPr>
+        <p:txBody>
+          <a:bodyPr xmlns:a="http://schemas.openxmlformats.org/drawingml/2006/main"/>
+          <a:lstStyle xmlns:a="http://schemas.openxmlformats.org/drawingml/2006/main"/>
+          <a:p xmlns:a="http://schemas.openxmlformats.org/drawingml/2006/main">
+            <a:r>
+              <a:rPr lang="en-US" sz="1700">
                 <a:solidFill>
                   <a:srgbClr val="111111"/>
                 </a:solidFill>
@@ -1220,19 +1649,19 @@
         </p:nvSpPr>
         <p:spPr>
           <a:xfrm xmlns:a="http://schemas.openxmlformats.org/drawingml/2006/main">
-            <a:off x="6840000" y="1980000"/>
-            <a:ext cx="2592000" cy="792000"/>
-          </a:xfrm>
-          <a:prstGeom xmlns:a="http://schemas.openxmlformats.org/drawingml/2006/main" prst="rect">
-            <a:avLst/>
-          </a:prstGeom>
-        </p:spPr>
-        <p:txBody>
-          <a:bodyPr xmlns:a="http://schemas.openxmlformats.org/drawingml/2006/main"/>
-          <a:lstStyle xmlns:a="http://schemas.openxmlformats.org/drawingml/2006/main"/>
-          <a:p xmlns:a="http://schemas.openxmlformats.org/drawingml/2006/main">
-            <a:r>
-              <a:rPr lang="en-US" sz="4000" b="1">
+            <a:off x="6311988" y="1872000"/>
+            <a:ext cx="2688001" cy="684000"/>
+          </a:xfrm>
+          <a:prstGeom xmlns:a="http://schemas.openxmlformats.org/drawingml/2006/main" prst="rect">
+            <a:avLst/>
+          </a:prstGeom>
+        </p:spPr>
+        <p:txBody>
+          <a:bodyPr xmlns:a="http://schemas.openxmlformats.org/drawingml/2006/main"/>
+          <a:lstStyle xmlns:a="http://schemas.openxmlformats.org/drawingml/2006/main"/>
+          <a:p xmlns:a="http://schemas.openxmlformats.org/drawingml/2006/main">
+            <a:r>
+              <a:rPr lang="en-US" sz="2600" b="1">
                 <a:solidFill>
                   <a:srgbClr val="002FA7"/>
                 </a:solidFill>
@@ -1252,19 +1681,19 @@
         </p:nvSpPr>
         <p:spPr>
           <a:xfrm xmlns:a="http://schemas.openxmlformats.org/drawingml/2006/main">
-            <a:off x="6840000" y="2808000"/>
-            <a:ext cx="2592000" cy="1044000"/>
-          </a:xfrm>
-          <a:prstGeom xmlns:a="http://schemas.openxmlformats.org/drawingml/2006/main" prst="rect">
-            <a:avLst/>
-          </a:prstGeom>
-        </p:spPr>
-        <p:txBody>
-          <a:bodyPr xmlns:a="http://schemas.openxmlformats.org/drawingml/2006/main"/>
-          <a:lstStyle xmlns:a="http://schemas.openxmlformats.org/drawingml/2006/main"/>
-          <a:p xmlns:a="http://schemas.openxmlformats.org/drawingml/2006/main">
-            <a:r>
-              <a:rPr lang="en-US" sz="1800">
+            <a:off x="6311988" y="2628000"/>
+            <a:ext cx="2688001" cy="1188000"/>
+          </a:xfrm>
+          <a:prstGeom xmlns:a="http://schemas.openxmlformats.org/drawingml/2006/main" prst="rect">
+            <a:avLst/>
+          </a:prstGeom>
+        </p:spPr>
+        <p:txBody>
+          <a:bodyPr xmlns:a="http://schemas.openxmlformats.org/drawingml/2006/main"/>
+          <a:lstStyle xmlns:a="http://schemas.openxmlformats.org/drawingml/2006/main"/>
+          <a:p xmlns:a="http://schemas.openxmlformats.org/drawingml/2006/main">
+            <a:r>
+              <a:rPr lang="en-US" sz="1700">
                 <a:solidFill>
                   <a:srgbClr val="111111"/>
                 </a:solidFill>
@@ -1338,8 +1767,72 @@
         </p:nvSpPr>
         <p:spPr>
           <a:xfrm xmlns:a="http://schemas.openxmlformats.org/drawingml/2006/main">
+            <a:off x="360000" y="180000"/>
+            <a:ext cx="5760000" cy="414000"/>
+          </a:xfrm>
+          <a:prstGeom xmlns:a="http://schemas.openxmlformats.org/drawingml/2006/main" prst="rect">
+            <a:avLst/>
+          </a:prstGeom>
+        </p:spPr>
+        <p:txBody>
+          <a:bodyPr xmlns:a="http://schemas.openxmlformats.org/drawingml/2006/main"/>
+          <a:lstStyle xmlns:a="http://schemas.openxmlformats.org/drawingml/2006/main"/>
+          <a:p xmlns:a="http://schemas.openxmlformats.org/drawingml/2006/main">
+            <a:r>
+              <a:rPr lang="en-US" sz="900">
+                <a:solidFill>
+                  <a:srgbClr val="111111"/>
+                </a:solidFill>
+                <a:latin typeface="Menlo"/>
+                <a:ea typeface="Menlo"/>
+              </a:rPr>
+              <a:t>从会用到会协作</a:t>
+            </a:r>
+          </a:p>
+        </p:txBody>
+      </p:sp>
+      <p:sp>
+        <p:nvSpPr>
+          <p:cNvPr id="100024" name="TextBox 2"/>
+          <p:cNvSpPr txBox="1"/>
+          <p:nvPr/>
+        </p:nvSpPr>
+        <p:spPr>
+          <a:xfrm xmlns:a="http://schemas.openxmlformats.org/drawingml/2006/main">
+            <a:off x="8712000" y="180000"/>
+            <a:ext cx="1152000" cy="414000"/>
+          </a:xfrm>
+          <a:prstGeom xmlns:a="http://schemas.openxmlformats.org/drawingml/2006/main" prst="rect">
+            <a:avLst/>
+          </a:prstGeom>
+        </p:spPr>
+        <p:txBody>
+          <a:bodyPr xmlns:a="http://schemas.openxmlformats.org/drawingml/2006/main"/>
+          <a:lstStyle xmlns:a="http://schemas.openxmlformats.org/drawingml/2006/main"/>
+          <a:p xmlns:a="http://schemas.openxmlformats.org/drawingml/2006/main">
+            <a:r>
+              <a:rPr lang="en-US" sz="900">
+                <a:solidFill>
+                  <a:srgbClr val="111111"/>
+                </a:solidFill>
+                <a:latin typeface="Menlo"/>
+                <a:ea typeface="Menlo"/>
+              </a:rPr>
+              <a:t>04 / 04</a:t>
+            </a:r>
+          </a:p>
+        </p:txBody>
+      </p:sp>
+      <p:sp>
+        <p:nvSpPr>
+          <p:cNvPr id="100025" name="TextBox 3"/>
+          <p:cNvSpPr txBox="1"/>
+          <p:nvPr/>
+        </p:nvSpPr>
+        <p:spPr>
+          <a:xfrm xmlns:a="http://schemas.openxmlformats.org/drawingml/2006/main">
             <a:off x="360000" y="360000"/>
-            <a:ext cx="1080000" cy="1152000"/>
+            <a:ext cx="1080000" cy="1332000"/>
           </a:xfrm>
           <a:prstGeom xmlns:a="http://schemas.openxmlformats.org/drawingml/2006/main" prst="rect">
             <a:avLst/>
@@ -1364,7 +1857,7 @@
       </p:sp>
       <p:sp>
         <p:nvSpPr>
-          <p:cNvPr id="100024" name="TextBox 2"/>
+          <p:cNvPr id="100026" name="TextBox 4"/>
           <p:cNvSpPr txBox="1"/>
           <p:nvPr/>
         </p:nvSpPr>
@@ -1396,14 +1889,14 @@
       </p:sp>
       <p:sp>
         <p:nvSpPr>
-          <p:cNvPr id="100025" name="TextBox 3"/>
+          <p:cNvPr id="100027" name="TextBox 5"/>
           <p:cNvSpPr txBox="1"/>
           <p:nvPr/>
         </p:nvSpPr>
         <p:spPr>
           <a:xfrm xmlns:a="http://schemas.openxmlformats.org/drawingml/2006/main">
             <a:off x="1080000" y="4320000"/>
-            <a:ext cx="2880000" cy="432000"/>
+            <a:ext cx="4320000" cy="432000"/>
           </a:xfrm>
           <a:prstGeom xmlns:a="http://schemas.openxmlformats.org/drawingml/2006/main" prst="rect">
             <a:avLst/>
@@ -1475,12 +1968,12 @@
     <a:fontScheme name="Office">
       <a:majorFont>
         <a:latin typeface="Calibri Light"/>
-        <a:ea typeface=""/>
+        <a:ea typeface="等线"/>
         <a:cs typeface=""/>
       </a:majorFont>
       <a:minorFont>
         <a:latin typeface="Calibri"/>
-        <a:ea typeface=""/>
+        <a:ea typeface="等线"/>
         <a:cs typeface=""/>
       </a:minorFont>
     </a:fontScheme>

--- a/write/507-ppt/examples/collaboration-swiss.pptx
+++ b/write/507-ppt/examples/collaboration-swiss.pptx
@@ -5,13 +5,13 @@
     <p:sldMasterId xmlns:r="http://schemas.openxmlformats.org/officeDocument/2006/relationships" id="2147483648" r:id="rId1"/>
   </p:sldMasterIdLst>
   <p:notesMasterIdLst>
-    <p:notesMasterId r:id="Re22a7fbefea04f85"/>
+    <p:notesMasterId r:id="R0529c3ea98c947c6"/>
   </p:notesMasterIdLst>
   <p:sldIdLst>
-    <p:sldId id="256" r:id="Rc4f480b255c247a9"/>
-    <p:sldId id="257" r:id="Rebd67e0c5e8d4798"/>
-    <p:sldId id="258" r:id="R47bddeb985ee48c1"/>
-    <p:sldId id="259" r:id="R55d1a6c6e7bb48cc"/>
+    <p:sldId id="256" r:id="R1dfcbab05de34507"/>
+    <p:sldId id="257" r:id="Rd49ccd845da24a36"/>
+    <p:sldId id="258" r:id="R30347c1a51584596"/>
+    <p:sldId id="259" r:id="R9ac0116c7a4a45cd"/>
   </p:sldIdLst>
   <p:sldSz cx="12192000" cy="6858000"/>
   <p:notesSz cx="6858000" cy="9144000"/>
@@ -968,20 +968,22 @@
         <p:spPr>
           <a:xfrm xmlns:a="http://schemas.openxmlformats.org/drawingml/2006/main">
             <a:off x="360000" y="180000"/>
-            <a:ext cx="5760000" cy="414000"/>
-          </a:xfrm>
-          <a:prstGeom xmlns:a="http://schemas.openxmlformats.org/drawingml/2006/main" prst="rect">
-            <a:avLst/>
-          </a:prstGeom>
-        </p:spPr>
-        <p:txBody>
-          <a:bodyPr xmlns:a="http://schemas.openxmlformats.org/drawingml/2006/main"/>
+            <a:ext cx="5760000" cy="288000"/>
+          </a:xfrm>
+          <a:prstGeom xmlns:a="http://schemas.openxmlformats.org/drawingml/2006/main" prst="rect">
+            <a:avLst/>
+          </a:prstGeom>
+        </p:spPr>
+        <p:txBody>
+          <a:bodyPr xmlns:a="http://schemas.openxmlformats.org/drawingml/2006/main" lIns="28800" tIns="28800" rIns="28800" bIns="28800">
+            <a:noAutofit/>
+          </a:bodyPr>
           <a:lstStyle xmlns:a="http://schemas.openxmlformats.org/drawingml/2006/main"/>
           <a:p xmlns:a="http://schemas.openxmlformats.org/drawingml/2006/main">
             <a:r>
               <a:rPr lang="en-US" sz="900">
                 <a:solidFill>
-                  <a:srgbClr val="111111"/>
+                  <a:srgbClr val="5F646B"/>
                 </a:solidFill>
                 <a:latin typeface="Menlo"/>
                 <a:ea typeface="Menlo"/>
@@ -999,21 +1001,23 @@
         </p:nvSpPr>
         <p:spPr>
           <a:xfrm xmlns:a="http://schemas.openxmlformats.org/drawingml/2006/main">
-            <a:off x="8712000" y="180000"/>
-            <a:ext cx="1152000" cy="414000"/>
-          </a:xfrm>
-          <a:prstGeom xmlns:a="http://schemas.openxmlformats.org/drawingml/2006/main" prst="rect">
-            <a:avLst/>
-          </a:prstGeom>
-        </p:spPr>
-        <p:txBody>
-          <a:bodyPr xmlns:a="http://schemas.openxmlformats.org/drawingml/2006/main"/>
+            <a:off x="8640000" y="180000"/>
+            <a:ext cx="1080000" cy="288000"/>
+          </a:xfrm>
+          <a:prstGeom xmlns:a="http://schemas.openxmlformats.org/drawingml/2006/main" prst="rect">
+            <a:avLst/>
+          </a:prstGeom>
+        </p:spPr>
+        <p:txBody>
+          <a:bodyPr xmlns:a="http://schemas.openxmlformats.org/drawingml/2006/main" lIns="28800" tIns="28800" rIns="28800" bIns="28800">
+            <a:noAutofit/>
+          </a:bodyPr>
           <a:lstStyle xmlns:a="http://schemas.openxmlformats.org/drawingml/2006/main"/>
           <a:p xmlns:a="http://schemas.openxmlformats.org/drawingml/2006/main">
             <a:r>
               <a:rPr lang="en-US" sz="900">
                 <a:solidFill>
-                  <a:srgbClr val="111111"/>
+                  <a:srgbClr val="5F646B"/>
                 </a:solidFill>
                 <a:latin typeface="Menlo"/>
                 <a:ea typeface="Menlo"/>
@@ -1026,24 +1030,50 @@
       <p:sp>
         <p:nvSpPr>
           <p:cNvPr id="100002" name="TextBox 3"/>
-          <p:cNvSpPr txBox="1"/>
-          <p:nvPr/>
-        </p:nvSpPr>
-        <p:spPr>
-          <a:xfrm xmlns:a="http://schemas.openxmlformats.org/drawingml/2006/main">
-            <a:off x="360000" y="1440000"/>
-            <a:ext cx="4680000" cy="540000"/>
-          </a:xfrm>
-          <a:prstGeom xmlns:a="http://schemas.openxmlformats.org/drawingml/2006/main" prst="rect">
-            <a:avLst/>
-          </a:prstGeom>
+          <p:cNvSpPr/>
+          <p:nvPr/>
+        </p:nvSpPr>
+        <p:spPr>
+          <a:xfrm xmlns:a="http://schemas.openxmlformats.org/drawingml/2006/main">
+            <a:off x="360000" y="486000"/>
+            <a:ext cx="792000" cy="28800"/>
+          </a:xfrm>
+          <a:prstGeom xmlns:a="http://schemas.openxmlformats.org/drawingml/2006/main" prst="rect">
+            <a:avLst/>
+          </a:prstGeom>
+          <a:solidFill xmlns:a="http://schemas.openxmlformats.org/drawingml/2006/main">
+            <a:srgbClr val="002FA7"/>
+          </a:solidFill>
         </p:spPr>
         <p:txBody>
           <a:bodyPr xmlns:a="http://schemas.openxmlformats.org/drawingml/2006/main"/>
           <a:lstStyle xmlns:a="http://schemas.openxmlformats.org/drawingml/2006/main"/>
-          <a:p xmlns:a="http://schemas.openxmlformats.org/drawingml/2006/main">
-            <a:r>
-              <a:rPr lang="en-US" sz="1700">
+          <a:p xmlns:a="http://schemas.openxmlformats.org/drawingml/2006/main"/>
+        </p:txBody>
+      </p:sp>
+      <p:sp>
+        <p:nvSpPr>
+          <p:cNvPr id="100003" name="TextBox 4"/>
+          <p:cNvSpPr txBox="1"/>
+          <p:nvPr/>
+        </p:nvSpPr>
+        <p:spPr>
+          <a:xfrm xmlns:a="http://schemas.openxmlformats.org/drawingml/2006/main">
+            <a:off x="360000" y="1152000"/>
+            <a:ext cx="4320000" cy="378000"/>
+          </a:xfrm>
+          <a:prstGeom xmlns:a="http://schemas.openxmlformats.org/drawingml/2006/main" prst="rect">
+            <a:avLst/>
+          </a:prstGeom>
+        </p:spPr>
+        <p:txBody>
+          <a:bodyPr xmlns:a="http://schemas.openxmlformats.org/drawingml/2006/main" lIns="28800" tIns="28800" rIns="28800" bIns="28800">
+            <a:noAutofit/>
+          </a:bodyPr>
+          <a:lstStyle xmlns:a="http://schemas.openxmlformats.org/drawingml/2006/main"/>
+          <a:p xmlns:a="http://schemas.openxmlformats.org/drawingml/2006/main">
+            <a:r>
+              <a:rPr lang="en-US" sz="1400">
                 <a:solidFill>
                   <a:srgbClr val="002FA7"/>
                 </a:solidFill>
@@ -1057,25 +1087,27 @@
       </p:sp>
       <p:sp>
         <p:nvSpPr>
-          <p:cNvPr id="100003" name="TextBox 4"/>
-          <p:cNvSpPr txBox="1"/>
-          <p:nvPr/>
-        </p:nvSpPr>
-        <p:spPr>
-          <a:xfrm xmlns:a="http://schemas.openxmlformats.org/drawingml/2006/main">
-            <a:off x="360000" y="1872000"/>
-            <a:ext cx="8280000" cy="972000"/>
-          </a:xfrm>
-          <a:prstGeom xmlns:a="http://schemas.openxmlformats.org/drawingml/2006/main" prst="rect">
-            <a:avLst/>
-          </a:prstGeom>
-        </p:spPr>
-        <p:txBody>
-          <a:bodyPr xmlns:a="http://schemas.openxmlformats.org/drawingml/2006/main"/>
-          <a:lstStyle xmlns:a="http://schemas.openxmlformats.org/drawingml/2006/main"/>
-          <a:p xmlns:a="http://schemas.openxmlformats.org/drawingml/2006/main">
-            <a:r>
-              <a:rPr lang="en-US" sz="4800" b="1">
+          <p:cNvPr id="100004" name="TextBox 5"/>
+          <p:cNvSpPr txBox="1"/>
+          <p:nvPr/>
+        </p:nvSpPr>
+        <p:spPr>
+          <a:xfrm xmlns:a="http://schemas.openxmlformats.org/drawingml/2006/main">
+            <a:off x="360000" y="1584000"/>
+            <a:ext cx="8820000" cy="1098000"/>
+          </a:xfrm>
+          <a:prstGeom xmlns:a="http://schemas.openxmlformats.org/drawingml/2006/main" prst="rect">
+            <a:avLst/>
+          </a:prstGeom>
+        </p:spPr>
+        <p:txBody>
+          <a:bodyPr xmlns:a="http://schemas.openxmlformats.org/drawingml/2006/main" lIns="28800" tIns="28800" rIns="28800" bIns="28800">
+            <a:noAutofit/>
+          </a:bodyPr>
+          <a:lstStyle xmlns:a="http://schemas.openxmlformats.org/drawingml/2006/main"/>
+          <a:p xmlns:a="http://schemas.openxmlformats.org/drawingml/2006/main">
+            <a:r>
+              <a:rPr lang="en-US" sz="4400" b="1">
                 <a:solidFill>
                   <a:srgbClr val="111111"/>
                 </a:solidFill>
@@ -1089,27 +1121,29 @@
       </p:sp>
       <p:sp>
         <p:nvSpPr>
-          <p:cNvPr id="100004" name="TextBox 5"/>
+          <p:cNvPr id="100005" name="TextBox 6"/>
           <p:cNvSpPr txBox="1"/>
           <p:nvPr/>
         </p:nvSpPr>
         <p:spPr>
           <a:xfrm xmlns:a="http://schemas.openxmlformats.org/drawingml/2006/main">
             <a:off x="360000" y="2880000"/>
-            <a:ext cx="6480000" cy="576000"/>
-          </a:xfrm>
-          <a:prstGeom xmlns:a="http://schemas.openxmlformats.org/drawingml/2006/main" prst="rect">
-            <a:avLst/>
-          </a:prstGeom>
-        </p:spPr>
-        <p:txBody>
-          <a:bodyPr xmlns:a="http://schemas.openxmlformats.org/drawingml/2006/main"/>
-          <a:lstStyle xmlns:a="http://schemas.openxmlformats.org/drawingml/2006/main"/>
-          <a:p xmlns:a="http://schemas.openxmlformats.org/drawingml/2006/main">
-            <a:r>
-              <a:rPr lang="en-US" sz="2300">
-                <a:solidFill>
-                  <a:srgbClr val="111111"/>
+            <a:ext cx="6840000" cy="666000"/>
+          </a:xfrm>
+          <a:prstGeom xmlns:a="http://schemas.openxmlformats.org/drawingml/2006/main" prst="rect">
+            <a:avLst/>
+          </a:prstGeom>
+        </p:spPr>
+        <p:txBody>
+          <a:bodyPr xmlns:a="http://schemas.openxmlformats.org/drawingml/2006/main" lIns="28800" tIns="28800" rIns="28800" bIns="28800">
+            <a:noAutofit/>
+          </a:bodyPr>
+          <a:lstStyle xmlns:a="http://schemas.openxmlformats.org/drawingml/2006/main"/>
+          <a:p xmlns:a="http://schemas.openxmlformats.org/drawingml/2006/main">
+            <a:r>
+              <a:rPr lang="en-US" sz="2100">
+                <a:solidFill>
+                  <a:srgbClr val="5F646B"/>
                 </a:solidFill>
                 <a:latin typeface="Helvetica"/>
                 <a:ea typeface="PingFang SC"/>
@@ -1121,27 +1155,29 @@
       </p:sp>
       <p:sp>
         <p:nvSpPr>
-          <p:cNvPr id="100005" name="TextBox 6"/>
-          <p:cNvSpPr txBox="1"/>
-          <p:nvPr/>
-        </p:nvSpPr>
-        <p:spPr>
-          <a:xfrm xmlns:a="http://schemas.openxmlformats.org/drawingml/2006/main">
-            <a:off x="360000" y="5112000"/>
-            <a:ext cx="4320000" cy="414000"/>
-          </a:xfrm>
-          <a:prstGeom xmlns:a="http://schemas.openxmlformats.org/drawingml/2006/main" prst="rect">
-            <a:avLst/>
-          </a:prstGeom>
-        </p:spPr>
-        <p:txBody>
-          <a:bodyPr xmlns:a="http://schemas.openxmlformats.org/drawingml/2006/main"/>
-          <a:lstStyle xmlns:a="http://schemas.openxmlformats.org/drawingml/2006/main"/>
-          <a:p xmlns:a="http://schemas.openxmlformats.org/drawingml/2006/main">
-            <a:r>
-              <a:rPr lang="en-US" sz="1000">
-                <a:solidFill>
-                  <a:srgbClr val="111111"/>
+          <p:cNvPr id="100006" name="TextBox 7"/>
+          <p:cNvSpPr txBox="1"/>
+          <p:nvPr/>
+        </p:nvSpPr>
+        <p:spPr>
+          <a:xfrm xmlns:a="http://schemas.openxmlformats.org/drawingml/2006/main">
+            <a:off x="360000" y="5184000"/>
+            <a:ext cx="5400000" cy="288000"/>
+          </a:xfrm>
+          <a:prstGeom xmlns:a="http://schemas.openxmlformats.org/drawingml/2006/main" prst="rect">
+            <a:avLst/>
+          </a:prstGeom>
+        </p:spPr>
+        <p:txBody>
+          <a:bodyPr xmlns:a="http://schemas.openxmlformats.org/drawingml/2006/main" lIns="28800" tIns="28800" rIns="28800" bIns="28800">
+            <a:noAutofit/>
+          </a:bodyPr>
+          <a:lstStyle xmlns:a="http://schemas.openxmlformats.org/drawingml/2006/main"/>
+          <a:p xmlns:a="http://schemas.openxmlformats.org/drawingml/2006/main">
+            <a:r>
+              <a:rPr lang="en-US" sz="900">
+                <a:solidFill>
+                  <a:srgbClr val="5F646B"/>
                 </a:solidFill>
                 <a:latin typeface="Menlo"/>
                 <a:ea typeface="Menlo"/>
@@ -1175,27 +1211,29 @@
       <p:grpSpPr/>
       <p:sp>
         <p:nvSpPr>
-          <p:cNvPr id="100006" name="TextBox 1"/>
+          <p:cNvPr id="100007" name="TextBox 1"/>
           <p:cNvSpPr txBox="1"/>
           <p:nvPr/>
         </p:nvSpPr>
         <p:spPr>
           <a:xfrm xmlns:a="http://schemas.openxmlformats.org/drawingml/2006/main">
             <a:off x="360000" y="180000"/>
-            <a:ext cx="5760000" cy="414000"/>
-          </a:xfrm>
-          <a:prstGeom xmlns:a="http://schemas.openxmlformats.org/drawingml/2006/main" prst="rect">
-            <a:avLst/>
-          </a:prstGeom>
-        </p:spPr>
-        <p:txBody>
-          <a:bodyPr xmlns:a="http://schemas.openxmlformats.org/drawingml/2006/main"/>
+            <a:ext cx="5760000" cy="288000"/>
+          </a:xfrm>
+          <a:prstGeom xmlns:a="http://schemas.openxmlformats.org/drawingml/2006/main" prst="rect">
+            <a:avLst/>
+          </a:prstGeom>
+        </p:spPr>
+        <p:txBody>
+          <a:bodyPr xmlns:a="http://schemas.openxmlformats.org/drawingml/2006/main" lIns="28800" tIns="28800" rIns="28800" bIns="28800">
+            <a:noAutofit/>
+          </a:bodyPr>
           <a:lstStyle xmlns:a="http://schemas.openxmlformats.org/drawingml/2006/main"/>
           <a:p xmlns:a="http://schemas.openxmlformats.org/drawingml/2006/main">
             <a:r>
               <a:rPr lang="en-US" sz="900">
                 <a:solidFill>
-                  <a:srgbClr val="111111"/>
+                  <a:srgbClr val="5F646B"/>
                 </a:solidFill>
                 <a:latin typeface="Menlo"/>
                 <a:ea typeface="Menlo"/>
@@ -1207,27 +1245,29 @@
       </p:sp>
       <p:sp>
         <p:nvSpPr>
-          <p:cNvPr id="100007" name="TextBox 2"/>
-          <p:cNvSpPr txBox="1"/>
-          <p:nvPr/>
-        </p:nvSpPr>
-        <p:spPr>
-          <a:xfrm xmlns:a="http://schemas.openxmlformats.org/drawingml/2006/main">
-            <a:off x="8712000" y="180000"/>
-            <a:ext cx="1152000" cy="414000"/>
-          </a:xfrm>
-          <a:prstGeom xmlns:a="http://schemas.openxmlformats.org/drawingml/2006/main" prst="rect">
-            <a:avLst/>
-          </a:prstGeom>
-        </p:spPr>
-        <p:txBody>
-          <a:bodyPr xmlns:a="http://schemas.openxmlformats.org/drawingml/2006/main"/>
+          <p:cNvPr id="100008" name="TextBox 2"/>
+          <p:cNvSpPr txBox="1"/>
+          <p:nvPr/>
+        </p:nvSpPr>
+        <p:spPr>
+          <a:xfrm xmlns:a="http://schemas.openxmlformats.org/drawingml/2006/main">
+            <a:off x="8640000" y="180000"/>
+            <a:ext cx="1080000" cy="288000"/>
+          </a:xfrm>
+          <a:prstGeom xmlns:a="http://schemas.openxmlformats.org/drawingml/2006/main" prst="rect">
+            <a:avLst/>
+          </a:prstGeom>
+        </p:spPr>
+        <p:txBody>
+          <a:bodyPr xmlns:a="http://schemas.openxmlformats.org/drawingml/2006/main" lIns="28800" tIns="28800" rIns="28800" bIns="28800">
+            <a:noAutofit/>
+          </a:bodyPr>
           <a:lstStyle xmlns:a="http://schemas.openxmlformats.org/drawingml/2006/main"/>
           <a:p xmlns:a="http://schemas.openxmlformats.org/drawingml/2006/main">
             <a:r>
               <a:rPr lang="en-US" sz="900">
                 <a:solidFill>
-                  <a:srgbClr val="111111"/>
+                  <a:srgbClr val="5F646B"/>
                 </a:solidFill>
                 <a:latin typeface="Menlo"/>
                 <a:ea typeface="Menlo"/>
@@ -1239,25 +1279,51 @@
       </p:sp>
       <p:sp>
         <p:nvSpPr>
-          <p:cNvPr id="100008" name="TextBox 3"/>
-          <p:cNvSpPr txBox="1"/>
-          <p:nvPr/>
-        </p:nvSpPr>
-        <p:spPr>
-          <a:xfrm xmlns:a="http://schemas.openxmlformats.org/drawingml/2006/main">
-            <a:off x="360000" y="1080000"/>
-            <a:ext cx="3600000" cy="468000"/>
-          </a:xfrm>
-          <a:prstGeom xmlns:a="http://schemas.openxmlformats.org/drawingml/2006/main" prst="rect">
-            <a:avLst/>
-          </a:prstGeom>
+          <p:cNvPr id="100009" name="TextBox 3"/>
+          <p:cNvSpPr/>
+          <p:nvPr/>
+        </p:nvSpPr>
+        <p:spPr>
+          <a:xfrm xmlns:a="http://schemas.openxmlformats.org/drawingml/2006/main">
+            <a:off x="360000" y="486000"/>
+            <a:ext cx="792000" cy="28800"/>
+          </a:xfrm>
+          <a:prstGeom xmlns:a="http://schemas.openxmlformats.org/drawingml/2006/main" prst="rect">
+            <a:avLst/>
+          </a:prstGeom>
+          <a:solidFill xmlns:a="http://schemas.openxmlformats.org/drawingml/2006/main">
+            <a:srgbClr val="002FA7"/>
+          </a:solidFill>
         </p:spPr>
         <p:txBody>
           <a:bodyPr xmlns:a="http://schemas.openxmlformats.org/drawingml/2006/main"/>
           <a:lstStyle xmlns:a="http://schemas.openxmlformats.org/drawingml/2006/main"/>
-          <a:p xmlns:a="http://schemas.openxmlformats.org/drawingml/2006/main">
-            <a:r>
-              <a:rPr lang="en-US" sz="1500">
+          <a:p xmlns:a="http://schemas.openxmlformats.org/drawingml/2006/main"/>
+        </p:txBody>
+      </p:sp>
+      <p:sp>
+        <p:nvSpPr>
+          <p:cNvPr id="100010" name="TextBox 4"/>
+          <p:cNvSpPr txBox="1"/>
+          <p:nvPr/>
+        </p:nvSpPr>
+        <p:spPr>
+          <a:xfrm xmlns:a="http://schemas.openxmlformats.org/drawingml/2006/main">
+            <a:off x="360000" y="810000"/>
+            <a:ext cx="3420000" cy="324000"/>
+          </a:xfrm>
+          <a:prstGeom xmlns:a="http://schemas.openxmlformats.org/drawingml/2006/main" prst="rect">
+            <a:avLst/>
+          </a:prstGeom>
+        </p:spPr>
+        <p:txBody>
+          <a:bodyPr xmlns:a="http://schemas.openxmlformats.org/drawingml/2006/main" lIns="28800" tIns="28800" rIns="28800" bIns="28800">
+            <a:noAutofit/>
+          </a:bodyPr>
+          <a:lstStyle xmlns:a="http://schemas.openxmlformats.org/drawingml/2006/main"/>
+          <a:p xmlns:a="http://schemas.openxmlformats.org/drawingml/2006/main">
+            <a:r>
+              <a:rPr lang="en-US" sz="1200">
                 <a:solidFill>
                   <a:srgbClr val="002FA7"/>
                 </a:solidFill>
@@ -1271,25 +1337,27 @@
       </p:sp>
       <p:sp>
         <p:nvSpPr>
-          <p:cNvPr id="100009" name="TextBox 4"/>
-          <p:cNvSpPr txBox="1"/>
-          <p:nvPr/>
-        </p:nvSpPr>
-        <p:spPr>
-          <a:xfrm xmlns:a="http://schemas.openxmlformats.org/drawingml/2006/main">
-            <a:off x="360000" y="1440000"/>
-            <a:ext cx="4320000" cy="720000"/>
-          </a:xfrm>
-          <a:prstGeom xmlns:a="http://schemas.openxmlformats.org/drawingml/2006/main" prst="rect">
-            <a:avLst/>
-          </a:prstGeom>
-        </p:spPr>
-        <p:txBody>
-          <a:bodyPr xmlns:a="http://schemas.openxmlformats.org/drawingml/2006/main"/>
-          <a:lstStyle xmlns:a="http://schemas.openxmlformats.org/drawingml/2006/main"/>
-          <a:p xmlns:a="http://schemas.openxmlformats.org/drawingml/2006/main">
-            <a:r>
-              <a:rPr lang="en-US" sz="3400" b="1">
+          <p:cNvPr id="100011" name="TextBox 5"/>
+          <p:cNvSpPr txBox="1"/>
+          <p:nvPr/>
+        </p:nvSpPr>
+        <p:spPr>
+          <a:xfrm xmlns:a="http://schemas.openxmlformats.org/drawingml/2006/main">
+            <a:off x="360000" y="1080000"/>
+            <a:ext cx="3420000" cy="702000"/>
+          </a:xfrm>
+          <a:prstGeom xmlns:a="http://schemas.openxmlformats.org/drawingml/2006/main" prst="rect">
+            <a:avLst/>
+          </a:prstGeom>
+        </p:spPr>
+        <p:txBody>
+          <a:bodyPr xmlns:a="http://schemas.openxmlformats.org/drawingml/2006/main" lIns="28800" tIns="28800" rIns="28800" bIns="28800">
+            <a:noAutofit/>
+          </a:bodyPr>
+          <a:lstStyle xmlns:a="http://schemas.openxmlformats.org/drawingml/2006/main"/>
+          <a:p xmlns:a="http://schemas.openxmlformats.org/drawingml/2006/main">
+            <a:r>
+              <a:rPr lang="en-US" sz="3000" b="1">
                 <a:solidFill>
                   <a:srgbClr val="111111"/>
                 </a:solidFill>
@@ -1303,27 +1371,29 @@
       </p:sp>
       <p:sp>
         <p:nvSpPr>
-          <p:cNvPr id="100010" name="TextBox 5"/>
-          <p:cNvSpPr txBox="1"/>
-          <p:nvPr/>
-        </p:nvSpPr>
-        <p:spPr>
-          <a:xfrm xmlns:a="http://schemas.openxmlformats.org/drawingml/2006/main">
-            <a:off x="360000" y="2160000"/>
-            <a:ext cx="4320000" cy="1116000"/>
-          </a:xfrm>
-          <a:prstGeom xmlns:a="http://schemas.openxmlformats.org/drawingml/2006/main" prst="rect">
-            <a:avLst/>
-          </a:prstGeom>
-        </p:spPr>
-        <p:txBody>
-          <a:bodyPr xmlns:a="http://schemas.openxmlformats.org/drawingml/2006/main"/>
-          <a:lstStyle xmlns:a="http://schemas.openxmlformats.org/drawingml/2006/main"/>
-          <a:p xmlns:a="http://schemas.openxmlformats.org/drawingml/2006/main">
-            <a:r>
-              <a:rPr lang="en-US" sz="2000">
-                <a:solidFill>
-                  <a:srgbClr val="111111"/>
+          <p:cNvPr id="100012" name="TextBox 6"/>
+          <p:cNvSpPr txBox="1"/>
+          <p:nvPr/>
+        </p:nvSpPr>
+        <p:spPr>
+          <a:xfrm xmlns:a="http://schemas.openxmlformats.org/drawingml/2006/main">
+            <a:off x="360000" y="1908000"/>
+            <a:ext cx="3420000" cy="1206000"/>
+          </a:xfrm>
+          <a:prstGeom xmlns:a="http://schemas.openxmlformats.org/drawingml/2006/main" prst="rect">
+            <a:avLst/>
+          </a:prstGeom>
+        </p:spPr>
+        <p:txBody>
+          <a:bodyPr xmlns:a="http://schemas.openxmlformats.org/drawingml/2006/main" lIns="28800" tIns="28800" rIns="28800" bIns="28800">
+            <a:noAutofit/>
+          </a:bodyPr>
+          <a:lstStyle xmlns:a="http://schemas.openxmlformats.org/drawingml/2006/main"/>
+          <a:p xmlns:a="http://schemas.openxmlformats.org/drawingml/2006/main">
+            <a:r>
+              <a:rPr lang="en-US" sz="1800">
+                <a:solidFill>
+                  <a:srgbClr val="5F646B"/>
                 </a:solidFill>
                 <a:latin typeface="Helvetica"/>
                 <a:ea typeface="PingFang SC"/>
@@ -1335,17 +1405,17 @@
       </p:sp>
       <p:pic>
         <p:nvPicPr>
-          <p:cNvPr id="100011" name="Picture 1" descr="包含文件、编辑器和预览区域的抽象工作台示意图"/>
+          <p:cNvPr id="100013" name="Picture 1" descr="包含文件、编辑器和预览区域的抽象工作台示意图"/>
           <p:cNvPicPr>
             <a:picLocks xmlns:a="http://schemas.openxmlformats.org/drawingml/2006/main" noChangeAspect="1"/>
           </p:cNvPicPr>
           <p:nvPr/>
         </p:nvPicPr>
         <p:blipFill>
-          <a:blip xmlns:r="http://schemas.openxmlformats.org/officeDocument/2006/relationships" xmlns:a="http://schemas.openxmlformats.org/drawingml/2006/main" r:embed="Rc02fc022c374489e">
+          <a:blip xmlns:r="http://schemas.openxmlformats.org/officeDocument/2006/relationships" xmlns:a="http://schemas.openxmlformats.org/drawingml/2006/main" r:embed="Rb5cc7979bfaf46ca">
             <a:extLst>
               <a:ext uri="{96DAC541-7B7A-43D3-8B79-37D633B846F1}">
-                <asvg:svgBlip xmlns:asvg="http://schemas.microsoft.com/office/drawing/2016/SVG/main" r:embed="Rcba9f3c7961a4eb6"/>
+                <asvg:svgBlip xmlns:asvg="http://schemas.microsoft.com/office/drawing/2016/SVG/main" r:embed="R98cfa3c071904627"/>
               </a:ext>
             </a:extLst>
           </a:blip>
@@ -1355,8 +1425,8 @@
         </p:blipFill>
         <p:spPr>
           <a:xfrm xmlns:a="http://schemas.openxmlformats.org/drawingml/2006/main">
-            <a:off x="5472000" y="1440000"/>
-            <a:ext cx="4140000" cy="2160000"/>
+            <a:off x="4140000" y="1195877"/>
+            <a:ext cx="5220000" cy="2936250"/>
           </a:xfrm>
           <a:prstGeom xmlns:a="http://schemas.openxmlformats.org/drawingml/2006/main" prst="rect">
             <a:avLst/>
@@ -1365,27 +1435,29 @@
       </p:pic>
       <p:sp>
         <p:nvSpPr>
-          <p:cNvPr id="100012" name="TextBox 6"/>
-          <p:cNvSpPr txBox="1"/>
-          <p:nvPr/>
-        </p:nvSpPr>
-        <p:spPr>
-          <a:xfrm xmlns:a="http://schemas.openxmlformats.org/drawingml/2006/main">
-            <a:off x="5472000" y="3708000"/>
-            <a:ext cx="4140000" cy="414000"/>
-          </a:xfrm>
-          <a:prstGeom xmlns:a="http://schemas.openxmlformats.org/drawingml/2006/main" prst="rect">
-            <a:avLst/>
-          </a:prstGeom>
-        </p:spPr>
-        <p:txBody>
-          <a:bodyPr xmlns:a="http://schemas.openxmlformats.org/drawingml/2006/main"/>
+          <p:cNvPr id="100014" name="TextBox 7"/>
+          <p:cNvSpPr txBox="1"/>
+          <p:nvPr/>
+        </p:nvSpPr>
+        <p:spPr>
+          <a:xfrm xmlns:a="http://schemas.openxmlformats.org/drawingml/2006/main">
+            <a:off x="4140000" y="4500000"/>
+            <a:ext cx="5220000" cy="306000"/>
+          </a:xfrm>
+          <a:prstGeom xmlns:a="http://schemas.openxmlformats.org/drawingml/2006/main" prst="rect">
+            <a:avLst/>
+          </a:prstGeom>
+        </p:spPr>
+        <p:txBody>
+          <a:bodyPr xmlns:a="http://schemas.openxmlformats.org/drawingml/2006/main" lIns="28800" tIns="28800" rIns="28800" bIns="28800">
+            <a:noAutofit/>
+          </a:bodyPr>
           <a:lstStyle xmlns:a="http://schemas.openxmlformats.org/drawingml/2006/main"/>
           <a:p xmlns:a="http://schemas.openxmlformats.org/drawingml/2006/main">
             <a:r>
               <a:rPr lang="en-US" sz="1000">
                 <a:solidFill>
-                  <a:srgbClr val="111111"/>
+                  <a:srgbClr val="5F646B"/>
                 </a:solidFill>
                 <a:latin typeface="Menlo"/>
                 <a:ea typeface="Menlo"/>
@@ -1419,27 +1491,29 @@
       <p:grpSpPr/>
       <p:sp>
         <p:nvSpPr>
-          <p:cNvPr id="100013" name="TextBox 1"/>
+          <p:cNvPr id="100015" name="TextBox 1"/>
           <p:cNvSpPr txBox="1"/>
           <p:nvPr/>
         </p:nvSpPr>
         <p:spPr>
           <a:xfrm xmlns:a="http://schemas.openxmlformats.org/drawingml/2006/main">
             <a:off x="360000" y="180000"/>
-            <a:ext cx="5760000" cy="414000"/>
-          </a:xfrm>
-          <a:prstGeom xmlns:a="http://schemas.openxmlformats.org/drawingml/2006/main" prst="rect">
-            <a:avLst/>
-          </a:prstGeom>
-        </p:spPr>
-        <p:txBody>
-          <a:bodyPr xmlns:a="http://schemas.openxmlformats.org/drawingml/2006/main"/>
+            <a:ext cx="5760000" cy="288000"/>
+          </a:xfrm>
+          <a:prstGeom xmlns:a="http://schemas.openxmlformats.org/drawingml/2006/main" prst="rect">
+            <a:avLst/>
+          </a:prstGeom>
+        </p:spPr>
+        <p:txBody>
+          <a:bodyPr xmlns:a="http://schemas.openxmlformats.org/drawingml/2006/main" lIns="28800" tIns="28800" rIns="28800" bIns="28800">
+            <a:noAutofit/>
+          </a:bodyPr>
           <a:lstStyle xmlns:a="http://schemas.openxmlformats.org/drawingml/2006/main"/>
           <a:p xmlns:a="http://schemas.openxmlformats.org/drawingml/2006/main">
             <a:r>
               <a:rPr lang="en-US" sz="900">
                 <a:solidFill>
-                  <a:srgbClr val="111111"/>
+                  <a:srgbClr val="5F646B"/>
                 </a:solidFill>
                 <a:latin typeface="Menlo"/>
                 <a:ea typeface="Menlo"/>
@@ -1451,27 +1525,29 @@
       </p:sp>
       <p:sp>
         <p:nvSpPr>
-          <p:cNvPr id="100014" name="TextBox 2"/>
-          <p:cNvSpPr txBox="1"/>
-          <p:nvPr/>
-        </p:nvSpPr>
-        <p:spPr>
-          <a:xfrm xmlns:a="http://schemas.openxmlformats.org/drawingml/2006/main">
-            <a:off x="8712000" y="180000"/>
-            <a:ext cx="1152000" cy="414000"/>
-          </a:xfrm>
-          <a:prstGeom xmlns:a="http://schemas.openxmlformats.org/drawingml/2006/main" prst="rect">
-            <a:avLst/>
-          </a:prstGeom>
-        </p:spPr>
-        <p:txBody>
-          <a:bodyPr xmlns:a="http://schemas.openxmlformats.org/drawingml/2006/main"/>
+          <p:cNvPr id="100016" name="TextBox 2"/>
+          <p:cNvSpPr txBox="1"/>
+          <p:nvPr/>
+        </p:nvSpPr>
+        <p:spPr>
+          <a:xfrm xmlns:a="http://schemas.openxmlformats.org/drawingml/2006/main">
+            <a:off x="8640000" y="180000"/>
+            <a:ext cx="1080000" cy="288000"/>
+          </a:xfrm>
+          <a:prstGeom xmlns:a="http://schemas.openxmlformats.org/drawingml/2006/main" prst="rect">
+            <a:avLst/>
+          </a:prstGeom>
+        </p:spPr>
+        <p:txBody>
+          <a:bodyPr xmlns:a="http://schemas.openxmlformats.org/drawingml/2006/main" lIns="28800" tIns="28800" rIns="28800" bIns="28800">
+            <a:noAutofit/>
+          </a:bodyPr>
           <a:lstStyle xmlns:a="http://schemas.openxmlformats.org/drawingml/2006/main"/>
           <a:p xmlns:a="http://schemas.openxmlformats.org/drawingml/2006/main">
             <a:r>
               <a:rPr lang="en-US" sz="900">
                 <a:solidFill>
-                  <a:srgbClr val="111111"/>
+                  <a:srgbClr val="5F646B"/>
                 </a:solidFill>
                 <a:latin typeface="Menlo"/>
                 <a:ea typeface="Menlo"/>
@@ -1483,25 +1559,51 @@
       </p:sp>
       <p:sp>
         <p:nvSpPr>
-          <p:cNvPr id="100015" name="TextBox 3"/>
-          <p:cNvSpPr txBox="1"/>
-          <p:nvPr/>
-        </p:nvSpPr>
-        <p:spPr>
-          <a:xfrm xmlns:a="http://schemas.openxmlformats.org/drawingml/2006/main">
-            <a:off x="360000" y="900000"/>
-            <a:ext cx="8640000" cy="720000"/>
-          </a:xfrm>
-          <a:prstGeom xmlns:a="http://schemas.openxmlformats.org/drawingml/2006/main" prst="rect">
-            <a:avLst/>
-          </a:prstGeom>
+          <p:cNvPr id="100017" name="TextBox 3"/>
+          <p:cNvSpPr/>
+          <p:nvPr/>
+        </p:nvSpPr>
+        <p:spPr>
+          <a:xfrm xmlns:a="http://schemas.openxmlformats.org/drawingml/2006/main">
+            <a:off x="360000" y="486000"/>
+            <a:ext cx="792000" cy="28800"/>
+          </a:xfrm>
+          <a:prstGeom xmlns:a="http://schemas.openxmlformats.org/drawingml/2006/main" prst="rect">
+            <a:avLst/>
+          </a:prstGeom>
+          <a:solidFill xmlns:a="http://schemas.openxmlformats.org/drawingml/2006/main">
+            <a:srgbClr val="002FA7"/>
+          </a:solidFill>
         </p:spPr>
         <p:txBody>
           <a:bodyPr xmlns:a="http://schemas.openxmlformats.org/drawingml/2006/main"/>
           <a:lstStyle xmlns:a="http://schemas.openxmlformats.org/drawingml/2006/main"/>
-          <a:p xmlns:a="http://schemas.openxmlformats.org/drawingml/2006/main">
-            <a:r>
-              <a:rPr lang="en-US" sz="3400" b="1">
+          <a:p xmlns:a="http://schemas.openxmlformats.org/drawingml/2006/main"/>
+        </p:txBody>
+      </p:sp>
+      <p:sp>
+        <p:nvSpPr>
+          <p:cNvPr id="100018" name="TextBox 4"/>
+          <p:cNvSpPr txBox="1"/>
+          <p:nvPr/>
+        </p:nvSpPr>
+        <p:spPr>
+          <a:xfrm xmlns:a="http://schemas.openxmlformats.org/drawingml/2006/main">
+            <a:off x="360000" y="792000"/>
+            <a:ext cx="8640000" cy="594000"/>
+          </a:xfrm>
+          <a:prstGeom xmlns:a="http://schemas.openxmlformats.org/drawingml/2006/main" prst="rect">
+            <a:avLst/>
+          </a:prstGeom>
+        </p:spPr>
+        <p:txBody>
+          <a:bodyPr xmlns:a="http://schemas.openxmlformats.org/drawingml/2006/main" lIns="28800" tIns="28800" rIns="28800" bIns="28800">
+            <a:noAutofit/>
+          </a:bodyPr>
+          <a:lstStyle xmlns:a="http://schemas.openxmlformats.org/drawingml/2006/main"/>
+          <a:p xmlns:a="http://schemas.openxmlformats.org/drawingml/2006/main">
+            <a:r>
+              <a:rPr lang="en-US" sz="3200" b="1">
                 <a:solidFill>
                   <a:srgbClr val="111111"/>
                 </a:solidFill>
@@ -1515,25 +1617,66 @@
       </p:sp>
       <p:sp>
         <p:nvSpPr>
-          <p:cNvPr id="100016" name="TextBox 4"/>
+          <p:cNvPr id="100019" name="TextBox 5"/>
+          <p:cNvSpPr/>
+          <p:nvPr/>
+        </p:nvSpPr>
+        <p:spPr>
+          <a:xfrm xmlns:a="http://schemas.openxmlformats.org/drawingml/2006/main">
+            <a:off x="360000" y="1620000"/>
+            <a:ext cx="2724001" cy="2646000"/>
+          </a:xfrm>
+          <a:prstGeom xmlns:a="http://schemas.openxmlformats.org/drawingml/2006/main" prst="rect">
+            <a:avLst/>
+          </a:prstGeom>
+          <a:solidFill xmlns:a="http://schemas.openxmlformats.org/drawingml/2006/main">
+            <a:srgbClr val="FFFFFF"/>
+          </a:solidFill>
+          <a:ln xmlns:a="http://schemas.openxmlformats.org/drawingml/2006/main" w="12700">
+            <a:solidFill>
+              <a:srgbClr val="B8BBC0"/>
+            </a:solidFill>
+          </a:ln>
+        </p:spPr>
+        <p:txBody>
+          <a:bodyPr xmlns:a="http://schemas.openxmlformats.org/drawingml/2006/main" lIns="28800" tIns="28800" rIns="28800" bIns="28800">
+            <a:noAutofit/>
+          </a:bodyPr>
+          <a:lstStyle xmlns:a="http://schemas.openxmlformats.org/drawingml/2006/main"/>
+          <a:p xmlns:a="http://schemas.openxmlformats.org/drawingml/2006/main">
+            <a:endParaRPr lang="en-US" sz="100">
+              <a:solidFill>
+                <a:srgbClr val="111111"/>
+              </a:solidFill>
+              <a:latin typeface="Helvetica"/>
+              <a:ea typeface="PingFang SC"/>
+            </a:endParaRPr>
+          </a:p>
+        </p:txBody>
+      </p:sp>
+      <p:sp>
+        <p:nvSpPr>
+          <p:cNvPr id="100020" name="TextBox 6"/>
           <p:cNvSpPr txBox="1"/>
           <p:nvPr/>
         </p:nvSpPr>
         <p:spPr>
           <a:xfrm xmlns:a="http://schemas.openxmlformats.org/drawingml/2006/main">
             <a:off x="360000" y="1872000"/>
-            <a:ext cx="2688001" cy="684000"/>
-          </a:xfrm>
-          <a:prstGeom xmlns:a="http://schemas.openxmlformats.org/drawingml/2006/main" prst="rect">
-            <a:avLst/>
-          </a:prstGeom>
-        </p:spPr>
-        <p:txBody>
-          <a:bodyPr xmlns:a="http://schemas.openxmlformats.org/drawingml/2006/main"/>
-          <a:lstStyle xmlns:a="http://schemas.openxmlformats.org/drawingml/2006/main"/>
-          <a:p xmlns:a="http://schemas.openxmlformats.org/drawingml/2006/main">
-            <a:r>
-              <a:rPr lang="en-US" sz="2600" b="1">
+            <a:ext cx="2724001" cy="558000"/>
+          </a:xfrm>
+          <a:prstGeom xmlns:a="http://schemas.openxmlformats.org/drawingml/2006/main" prst="rect">
+            <a:avLst/>
+          </a:prstGeom>
+        </p:spPr>
+        <p:txBody>
+          <a:bodyPr xmlns:a="http://schemas.openxmlformats.org/drawingml/2006/main" lIns="28800" tIns="28800" rIns="28800" bIns="28800">
+            <a:noAutofit/>
+          </a:bodyPr>
+          <a:lstStyle xmlns:a="http://schemas.openxmlformats.org/drawingml/2006/main"/>
+          <a:p xmlns:a="http://schemas.openxmlformats.org/drawingml/2006/main">
+            <a:r>
+              <a:rPr lang="en-US" sz="2300" b="1">
                 <a:solidFill>
                   <a:srgbClr val="002FA7"/>
                 </a:solidFill>
@@ -1547,25 +1690,27 @@
       </p:sp>
       <p:sp>
         <p:nvSpPr>
-          <p:cNvPr id="100017" name="TextBox 5"/>
-          <p:cNvSpPr txBox="1"/>
-          <p:nvPr/>
-        </p:nvSpPr>
-        <p:spPr>
-          <a:xfrm xmlns:a="http://schemas.openxmlformats.org/drawingml/2006/main">
-            <a:off x="360000" y="2628000"/>
-            <a:ext cx="2688001" cy="1188000"/>
-          </a:xfrm>
-          <a:prstGeom xmlns:a="http://schemas.openxmlformats.org/drawingml/2006/main" prst="rect">
-            <a:avLst/>
-          </a:prstGeom>
-        </p:spPr>
-        <p:txBody>
-          <a:bodyPr xmlns:a="http://schemas.openxmlformats.org/drawingml/2006/main"/>
-          <a:lstStyle xmlns:a="http://schemas.openxmlformats.org/drawingml/2006/main"/>
-          <a:p xmlns:a="http://schemas.openxmlformats.org/drawingml/2006/main">
-            <a:r>
-              <a:rPr lang="en-US" sz="1700">
+          <p:cNvPr id="100021" name="TextBox 7"/>
+          <p:cNvSpPr txBox="1"/>
+          <p:nvPr/>
+        </p:nvSpPr>
+        <p:spPr>
+          <a:xfrm xmlns:a="http://schemas.openxmlformats.org/drawingml/2006/main">
+            <a:off x="360000" y="2556000"/>
+            <a:ext cx="2724001" cy="1170000"/>
+          </a:xfrm>
+          <a:prstGeom xmlns:a="http://schemas.openxmlformats.org/drawingml/2006/main" prst="rect">
+            <a:avLst/>
+          </a:prstGeom>
+        </p:spPr>
+        <p:txBody>
+          <a:bodyPr xmlns:a="http://schemas.openxmlformats.org/drawingml/2006/main" lIns="28800" tIns="28800" rIns="28800" bIns="28800">
+            <a:noAutofit/>
+          </a:bodyPr>
+          <a:lstStyle xmlns:a="http://schemas.openxmlformats.org/drawingml/2006/main"/>
+          <a:p xmlns:a="http://schemas.openxmlformats.org/drawingml/2006/main">
+            <a:r>
+              <a:rPr lang="en-US" sz="1600">
                 <a:solidFill>
                   <a:srgbClr val="111111"/>
                 </a:solidFill>
@@ -1579,25 +1724,66 @@
       </p:sp>
       <p:sp>
         <p:nvSpPr>
-          <p:cNvPr id="100018" name="TextBox 6"/>
-          <p:cNvSpPr txBox="1"/>
-          <p:nvPr/>
-        </p:nvSpPr>
-        <p:spPr>
-          <a:xfrm xmlns:a="http://schemas.openxmlformats.org/drawingml/2006/main">
-            <a:off x="3336001" y="1872000"/>
-            <a:ext cx="2688001" cy="684000"/>
-          </a:xfrm>
-          <a:prstGeom xmlns:a="http://schemas.openxmlformats.org/drawingml/2006/main" prst="rect">
-            <a:avLst/>
-          </a:prstGeom>
-        </p:spPr>
-        <p:txBody>
-          <a:bodyPr xmlns:a="http://schemas.openxmlformats.org/drawingml/2006/main"/>
-          <a:lstStyle xmlns:a="http://schemas.openxmlformats.org/drawingml/2006/main"/>
-          <a:p xmlns:a="http://schemas.openxmlformats.org/drawingml/2006/main">
-            <a:r>
-              <a:rPr lang="en-US" sz="2600" b="1">
+          <p:cNvPr id="100022" name="TextBox 8"/>
+          <p:cNvSpPr/>
+          <p:nvPr/>
+        </p:nvSpPr>
+        <p:spPr>
+          <a:xfrm xmlns:a="http://schemas.openxmlformats.org/drawingml/2006/main">
+            <a:off x="3318001" y="1620000"/>
+            <a:ext cx="2724001" cy="2646000"/>
+          </a:xfrm>
+          <a:prstGeom xmlns:a="http://schemas.openxmlformats.org/drawingml/2006/main" prst="rect">
+            <a:avLst/>
+          </a:prstGeom>
+          <a:solidFill xmlns:a="http://schemas.openxmlformats.org/drawingml/2006/main">
+            <a:srgbClr val="FFFFFF"/>
+          </a:solidFill>
+          <a:ln xmlns:a="http://schemas.openxmlformats.org/drawingml/2006/main" w="12700">
+            <a:solidFill>
+              <a:srgbClr val="B8BBC0"/>
+            </a:solidFill>
+          </a:ln>
+        </p:spPr>
+        <p:txBody>
+          <a:bodyPr xmlns:a="http://schemas.openxmlformats.org/drawingml/2006/main" lIns="28800" tIns="28800" rIns="28800" bIns="28800">
+            <a:noAutofit/>
+          </a:bodyPr>
+          <a:lstStyle xmlns:a="http://schemas.openxmlformats.org/drawingml/2006/main"/>
+          <a:p xmlns:a="http://schemas.openxmlformats.org/drawingml/2006/main">
+            <a:endParaRPr lang="en-US" sz="100">
+              <a:solidFill>
+                <a:srgbClr val="111111"/>
+              </a:solidFill>
+              <a:latin typeface="Helvetica"/>
+              <a:ea typeface="PingFang SC"/>
+            </a:endParaRPr>
+          </a:p>
+        </p:txBody>
+      </p:sp>
+      <p:sp>
+        <p:nvSpPr>
+          <p:cNvPr id="100023" name="TextBox 9"/>
+          <p:cNvSpPr txBox="1"/>
+          <p:nvPr/>
+        </p:nvSpPr>
+        <p:spPr>
+          <a:xfrm xmlns:a="http://schemas.openxmlformats.org/drawingml/2006/main">
+            <a:off x="3318001" y="1872000"/>
+            <a:ext cx="2724001" cy="558000"/>
+          </a:xfrm>
+          <a:prstGeom xmlns:a="http://schemas.openxmlformats.org/drawingml/2006/main" prst="rect">
+            <a:avLst/>
+          </a:prstGeom>
+        </p:spPr>
+        <p:txBody>
+          <a:bodyPr xmlns:a="http://schemas.openxmlformats.org/drawingml/2006/main" lIns="28800" tIns="28800" rIns="28800" bIns="28800">
+            <a:noAutofit/>
+          </a:bodyPr>
+          <a:lstStyle xmlns:a="http://schemas.openxmlformats.org/drawingml/2006/main"/>
+          <a:p xmlns:a="http://schemas.openxmlformats.org/drawingml/2006/main">
+            <a:r>
+              <a:rPr lang="en-US" sz="2300" b="1">
                 <a:solidFill>
                   <a:srgbClr val="002FA7"/>
                 </a:solidFill>
@@ -1611,25 +1797,27 @@
       </p:sp>
       <p:sp>
         <p:nvSpPr>
-          <p:cNvPr id="100019" name="TextBox 7"/>
-          <p:cNvSpPr txBox="1"/>
-          <p:nvPr/>
-        </p:nvSpPr>
-        <p:spPr>
-          <a:xfrm xmlns:a="http://schemas.openxmlformats.org/drawingml/2006/main">
-            <a:off x="3336001" y="2628000"/>
-            <a:ext cx="2688001" cy="1188000"/>
-          </a:xfrm>
-          <a:prstGeom xmlns:a="http://schemas.openxmlformats.org/drawingml/2006/main" prst="rect">
-            <a:avLst/>
-          </a:prstGeom>
-        </p:spPr>
-        <p:txBody>
-          <a:bodyPr xmlns:a="http://schemas.openxmlformats.org/drawingml/2006/main"/>
-          <a:lstStyle xmlns:a="http://schemas.openxmlformats.org/drawingml/2006/main"/>
-          <a:p xmlns:a="http://schemas.openxmlformats.org/drawingml/2006/main">
-            <a:r>
-              <a:rPr lang="en-US" sz="1700">
+          <p:cNvPr id="100024" name="TextBox 10"/>
+          <p:cNvSpPr txBox="1"/>
+          <p:nvPr/>
+        </p:nvSpPr>
+        <p:spPr>
+          <a:xfrm xmlns:a="http://schemas.openxmlformats.org/drawingml/2006/main">
+            <a:off x="3318001" y="2556000"/>
+            <a:ext cx="2724001" cy="1170000"/>
+          </a:xfrm>
+          <a:prstGeom xmlns:a="http://schemas.openxmlformats.org/drawingml/2006/main" prst="rect">
+            <a:avLst/>
+          </a:prstGeom>
+        </p:spPr>
+        <p:txBody>
+          <a:bodyPr xmlns:a="http://schemas.openxmlformats.org/drawingml/2006/main" lIns="28800" tIns="28800" rIns="28800" bIns="28800">
+            <a:noAutofit/>
+          </a:bodyPr>
+          <a:lstStyle xmlns:a="http://schemas.openxmlformats.org/drawingml/2006/main"/>
+          <a:p xmlns:a="http://schemas.openxmlformats.org/drawingml/2006/main">
+            <a:r>
+              <a:rPr lang="en-US" sz="1600">
                 <a:solidFill>
                   <a:srgbClr val="111111"/>
                 </a:solidFill>
@@ -1643,25 +1831,66 @@
       </p:sp>
       <p:sp>
         <p:nvSpPr>
-          <p:cNvPr id="100020" name="TextBox 8"/>
-          <p:cNvSpPr txBox="1"/>
-          <p:nvPr/>
-        </p:nvSpPr>
-        <p:spPr>
-          <a:xfrm xmlns:a="http://schemas.openxmlformats.org/drawingml/2006/main">
-            <a:off x="6311988" y="1872000"/>
-            <a:ext cx="2688001" cy="684000"/>
-          </a:xfrm>
-          <a:prstGeom xmlns:a="http://schemas.openxmlformats.org/drawingml/2006/main" prst="rect">
-            <a:avLst/>
-          </a:prstGeom>
-        </p:spPr>
-        <p:txBody>
-          <a:bodyPr xmlns:a="http://schemas.openxmlformats.org/drawingml/2006/main"/>
-          <a:lstStyle xmlns:a="http://schemas.openxmlformats.org/drawingml/2006/main"/>
-          <a:p xmlns:a="http://schemas.openxmlformats.org/drawingml/2006/main">
-            <a:r>
-              <a:rPr lang="en-US" sz="2600" b="1">
+          <p:cNvPr id="100025" name="TextBox 11"/>
+          <p:cNvSpPr/>
+          <p:nvPr/>
+        </p:nvSpPr>
+        <p:spPr>
+          <a:xfrm xmlns:a="http://schemas.openxmlformats.org/drawingml/2006/main">
+            <a:off x="6275988" y="1620000"/>
+            <a:ext cx="2724001" cy="2646000"/>
+          </a:xfrm>
+          <a:prstGeom xmlns:a="http://schemas.openxmlformats.org/drawingml/2006/main" prst="rect">
+            <a:avLst/>
+          </a:prstGeom>
+          <a:solidFill xmlns:a="http://schemas.openxmlformats.org/drawingml/2006/main">
+            <a:srgbClr val="FFFFFF"/>
+          </a:solidFill>
+          <a:ln xmlns:a="http://schemas.openxmlformats.org/drawingml/2006/main" w="12700">
+            <a:solidFill>
+              <a:srgbClr val="B8BBC0"/>
+            </a:solidFill>
+          </a:ln>
+        </p:spPr>
+        <p:txBody>
+          <a:bodyPr xmlns:a="http://schemas.openxmlformats.org/drawingml/2006/main" lIns="28800" tIns="28800" rIns="28800" bIns="28800">
+            <a:noAutofit/>
+          </a:bodyPr>
+          <a:lstStyle xmlns:a="http://schemas.openxmlformats.org/drawingml/2006/main"/>
+          <a:p xmlns:a="http://schemas.openxmlformats.org/drawingml/2006/main">
+            <a:endParaRPr lang="en-US" sz="100">
+              <a:solidFill>
+                <a:srgbClr val="111111"/>
+              </a:solidFill>
+              <a:latin typeface="Helvetica"/>
+              <a:ea typeface="PingFang SC"/>
+            </a:endParaRPr>
+          </a:p>
+        </p:txBody>
+      </p:sp>
+      <p:sp>
+        <p:nvSpPr>
+          <p:cNvPr id="100026" name="TextBox 12"/>
+          <p:cNvSpPr txBox="1"/>
+          <p:nvPr/>
+        </p:nvSpPr>
+        <p:spPr>
+          <a:xfrm xmlns:a="http://schemas.openxmlformats.org/drawingml/2006/main">
+            <a:off x="6275988" y="1872000"/>
+            <a:ext cx="2724001" cy="558000"/>
+          </a:xfrm>
+          <a:prstGeom xmlns:a="http://schemas.openxmlformats.org/drawingml/2006/main" prst="rect">
+            <a:avLst/>
+          </a:prstGeom>
+        </p:spPr>
+        <p:txBody>
+          <a:bodyPr xmlns:a="http://schemas.openxmlformats.org/drawingml/2006/main" lIns="28800" tIns="28800" rIns="28800" bIns="28800">
+            <a:noAutofit/>
+          </a:bodyPr>
+          <a:lstStyle xmlns:a="http://schemas.openxmlformats.org/drawingml/2006/main"/>
+          <a:p xmlns:a="http://schemas.openxmlformats.org/drawingml/2006/main">
+            <a:r>
+              <a:rPr lang="en-US" sz="2300" b="1">
                 <a:solidFill>
                   <a:srgbClr val="002FA7"/>
                 </a:solidFill>
@@ -1675,25 +1904,27 @@
       </p:sp>
       <p:sp>
         <p:nvSpPr>
-          <p:cNvPr id="100021" name="TextBox 9"/>
-          <p:cNvSpPr txBox="1"/>
-          <p:nvPr/>
-        </p:nvSpPr>
-        <p:spPr>
-          <a:xfrm xmlns:a="http://schemas.openxmlformats.org/drawingml/2006/main">
-            <a:off x="6311988" y="2628000"/>
-            <a:ext cx="2688001" cy="1188000"/>
-          </a:xfrm>
-          <a:prstGeom xmlns:a="http://schemas.openxmlformats.org/drawingml/2006/main" prst="rect">
-            <a:avLst/>
-          </a:prstGeom>
-        </p:spPr>
-        <p:txBody>
-          <a:bodyPr xmlns:a="http://schemas.openxmlformats.org/drawingml/2006/main"/>
-          <a:lstStyle xmlns:a="http://schemas.openxmlformats.org/drawingml/2006/main"/>
-          <a:p xmlns:a="http://schemas.openxmlformats.org/drawingml/2006/main">
-            <a:r>
-              <a:rPr lang="en-US" sz="1700">
+          <p:cNvPr id="100027" name="TextBox 13"/>
+          <p:cNvSpPr txBox="1"/>
+          <p:nvPr/>
+        </p:nvSpPr>
+        <p:spPr>
+          <a:xfrm xmlns:a="http://schemas.openxmlformats.org/drawingml/2006/main">
+            <a:off x="6275988" y="2556000"/>
+            <a:ext cx="2724001" cy="1170000"/>
+          </a:xfrm>
+          <a:prstGeom xmlns:a="http://schemas.openxmlformats.org/drawingml/2006/main" prst="rect">
+            <a:avLst/>
+          </a:prstGeom>
+        </p:spPr>
+        <p:txBody>
+          <a:bodyPr xmlns:a="http://schemas.openxmlformats.org/drawingml/2006/main" lIns="28800" tIns="28800" rIns="28800" bIns="28800">
+            <a:noAutofit/>
+          </a:bodyPr>
+          <a:lstStyle xmlns:a="http://schemas.openxmlformats.org/drawingml/2006/main"/>
+          <a:p xmlns:a="http://schemas.openxmlformats.org/drawingml/2006/main">
+            <a:r>
+              <a:rPr lang="en-US" sz="1600">
                 <a:solidFill>
                   <a:srgbClr val="111111"/>
                 </a:solidFill>
@@ -1707,30 +1938,32 @@
       </p:sp>
       <p:sp>
         <p:nvSpPr>
-          <p:cNvPr id="100022" name="TextBox 10"/>
-          <p:cNvSpPr txBox="1"/>
-          <p:nvPr/>
-        </p:nvSpPr>
-        <p:spPr>
-          <a:xfrm xmlns:a="http://schemas.openxmlformats.org/drawingml/2006/main">
-            <a:off x="360000" y="4788000"/>
-            <a:ext cx="8640000" cy="504000"/>
-          </a:xfrm>
-          <a:prstGeom xmlns:a="http://schemas.openxmlformats.org/drawingml/2006/main" prst="rect">
-            <a:avLst/>
-          </a:prstGeom>
-        </p:spPr>
-        <p:txBody>
-          <a:bodyPr xmlns:a="http://schemas.openxmlformats.org/drawingml/2006/main"/>
-          <a:lstStyle xmlns:a="http://schemas.openxmlformats.org/drawingml/2006/main"/>
-          <a:p xmlns:a="http://schemas.openxmlformats.org/drawingml/2006/main">
-            <a:r>
-              <a:rPr lang="en-US" sz="1800">
-                <a:solidFill>
-                  <a:srgbClr val="111111"/>
-                </a:solidFill>
-                <a:latin typeface="Helvetica"/>
-                <a:ea typeface="PingFang SC"/>
+          <p:cNvPr id="100028" name="TextBox 14"/>
+          <p:cNvSpPr txBox="1"/>
+          <p:nvPr/>
+        </p:nvSpPr>
+        <p:spPr>
+          <a:xfrm xmlns:a="http://schemas.openxmlformats.org/drawingml/2006/main">
+            <a:off x="360000" y="5184000"/>
+            <a:ext cx="5400000" cy="288000"/>
+          </a:xfrm>
+          <a:prstGeom xmlns:a="http://schemas.openxmlformats.org/drawingml/2006/main" prst="rect">
+            <a:avLst/>
+          </a:prstGeom>
+        </p:spPr>
+        <p:txBody>
+          <a:bodyPr xmlns:a="http://schemas.openxmlformats.org/drawingml/2006/main" lIns="28800" tIns="28800" rIns="28800" bIns="28800">
+            <a:noAutofit/>
+          </a:bodyPr>
+          <a:lstStyle xmlns:a="http://schemas.openxmlformats.org/drawingml/2006/main"/>
+          <a:p xmlns:a="http://schemas.openxmlformats.org/drawingml/2006/main">
+            <a:r>
+              <a:rPr lang="en-US" sz="900">
+                <a:solidFill>
+                  <a:srgbClr val="5F646B"/>
+                </a:solidFill>
+                <a:latin typeface="Menlo"/>
+                <a:ea typeface="Menlo"/>
               </a:rPr>
               <a:t>AI 负责生成、尝试、执行；人负责方向、边界与完成。</a:t>
             </a:r>
@@ -1748,7 +1981,7 @@
     <p:bg>
       <p:bgPr>
         <a:solidFill xmlns:a="http://schemas.openxmlformats.org/drawingml/2006/main">
-          <a:srgbClr val="111111"/>
+          <a:srgbClr val="F7F7F2"/>
         </a:solidFill>
       </p:bgPr>
     </p:bg>
@@ -1761,27 +1994,29 @@
       <p:grpSpPr/>
       <p:sp>
         <p:nvSpPr>
-          <p:cNvPr id="100023" name="TextBox 1"/>
+          <p:cNvPr id="100029" name="TextBox 1"/>
           <p:cNvSpPr txBox="1"/>
           <p:nvPr/>
         </p:nvSpPr>
         <p:spPr>
           <a:xfrm xmlns:a="http://schemas.openxmlformats.org/drawingml/2006/main">
             <a:off x="360000" y="180000"/>
-            <a:ext cx="5760000" cy="414000"/>
-          </a:xfrm>
-          <a:prstGeom xmlns:a="http://schemas.openxmlformats.org/drawingml/2006/main" prst="rect">
-            <a:avLst/>
-          </a:prstGeom>
-        </p:spPr>
-        <p:txBody>
-          <a:bodyPr xmlns:a="http://schemas.openxmlformats.org/drawingml/2006/main"/>
+            <a:ext cx="5760000" cy="288000"/>
+          </a:xfrm>
+          <a:prstGeom xmlns:a="http://schemas.openxmlformats.org/drawingml/2006/main" prst="rect">
+            <a:avLst/>
+          </a:prstGeom>
+        </p:spPr>
+        <p:txBody>
+          <a:bodyPr xmlns:a="http://schemas.openxmlformats.org/drawingml/2006/main" lIns="28800" tIns="28800" rIns="28800" bIns="28800">
+            <a:noAutofit/>
+          </a:bodyPr>
           <a:lstStyle xmlns:a="http://schemas.openxmlformats.org/drawingml/2006/main"/>
           <a:p xmlns:a="http://schemas.openxmlformats.org/drawingml/2006/main">
             <a:r>
               <a:rPr lang="en-US" sz="900">
                 <a:solidFill>
-                  <a:srgbClr val="111111"/>
+                  <a:srgbClr val="5F646B"/>
                 </a:solidFill>
                 <a:latin typeface="Menlo"/>
                 <a:ea typeface="Menlo"/>
@@ -1793,27 +2028,29 @@
       </p:sp>
       <p:sp>
         <p:nvSpPr>
-          <p:cNvPr id="100024" name="TextBox 2"/>
-          <p:cNvSpPr txBox="1"/>
-          <p:nvPr/>
-        </p:nvSpPr>
-        <p:spPr>
-          <a:xfrm xmlns:a="http://schemas.openxmlformats.org/drawingml/2006/main">
-            <a:off x="8712000" y="180000"/>
-            <a:ext cx="1152000" cy="414000"/>
-          </a:xfrm>
-          <a:prstGeom xmlns:a="http://schemas.openxmlformats.org/drawingml/2006/main" prst="rect">
-            <a:avLst/>
-          </a:prstGeom>
-        </p:spPr>
-        <p:txBody>
-          <a:bodyPr xmlns:a="http://schemas.openxmlformats.org/drawingml/2006/main"/>
+          <p:cNvPr id="100030" name="TextBox 2"/>
+          <p:cNvSpPr txBox="1"/>
+          <p:nvPr/>
+        </p:nvSpPr>
+        <p:spPr>
+          <a:xfrm xmlns:a="http://schemas.openxmlformats.org/drawingml/2006/main">
+            <a:off x="8640000" y="180000"/>
+            <a:ext cx="1080000" cy="288000"/>
+          </a:xfrm>
+          <a:prstGeom xmlns:a="http://schemas.openxmlformats.org/drawingml/2006/main" prst="rect">
+            <a:avLst/>
+          </a:prstGeom>
+        </p:spPr>
+        <p:txBody>
+          <a:bodyPr xmlns:a="http://schemas.openxmlformats.org/drawingml/2006/main" lIns="28800" tIns="28800" rIns="28800" bIns="28800">
+            <a:noAutofit/>
+          </a:bodyPr>
           <a:lstStyle xmlns:a="http://schemas.openxmlformats.org/drawingml/2006/main"/>
           <a:p xmlns:a="http://schemas.openxmlformats.org/drawingml/2006/main">
             <a:r>
               <a:rPr lang="en-US" sz="900">
                 <a:solidFill>
-                  <a:srgbClr val="111111"/>
+                  <a:srgbClr val="5F646B"/>
                 </a:solidFill>
                 <a:latin typeface="Menlo"/>
                 <a:ea typeface="Menlo"/>
@@ -1825,25 +2062,51 @@
       </p:sp>
       <p:sp>
         <p:nvSpPr>
-          <p:cNvPr id="100025" name="TextBox 3"/>
-          <p:cNvSpPr txBox="1"/>
-          <p:nvPr/>
-        </p:nvSpPr>
-        <p:spPr>
-          <a:xfrm xmlns:a="http://schemas.openxmlformats.org/drawingml/2006/main">
-            <a:off x="360000" y="360000"/>
-            <a:ext cx="1080000" cy="1332000"/>
-          </a:xfrm>
-          <a:prstGeom xmlns:a="http://schemas.openxmlformats.org/drawingml/2006/main" prst="rect">
-            <a:avLst/>
-          </a:prstGeom>
+          <p:cNvPr id="100031" name="TextBox 3"/>
+          <p:cNvSpPr/>
+          <p:nvPr/>
+        </p:nvSpPr>
+        <p:spPr>
+          <a:xfrm xmlns:a="http://schemas.openxmlformats.org/drawingml/2006/main">
+            <a:off x="360000" y="486000"/>
+            <a:ext cx="792000" cy="28800"/>
+          </a:xfrm>
+          <a:prstGeom xmlns:a="http://schemas.openxmlformats.org/drawingml/2006/main" prst="rect">
+            <a:avLst/>
+          </a:prstGeom>
+          <a:solidFill xmlns:a="http://schemas.openxmlformats.org/drawingml/2006/main">
+            <a:srgbClr val="002FA7"/>
+          </a:solidFill>
         </p:spPr>
         <p:txBody>
           <a:bodyPr xmlns:a="http://schemas.openxmlformats.org/drawingml/2006/main"/>
           <a:lstStyle xmlns:a="http://schemas.openxmlformats.org/drawingml/2006/main"/>
-          <a:p xmlns:a="http://schemas.openxmlformats.org/drawingml/2006/main">
-            <a:r>
-              <a:rPr lang="en-US" sz="8000">
+          <a:p xmlns:a="http://schemas.openxmlformats.org/drawingml/2006/main"/>
+        </p:txBody>
+      </p:sp>
+      <p:sp>
+        <p:nvSpPr>
+          <p:cNvPr id="100032" name="TextBox 4"/>
+          <p:cNvSpPr txBox="1"/>
+          <p:nvPr/>
+        </p:nvSpPr>
+        <p:spPr>
+          <a:xfrm xmlns:a="http://schemas.openxmlformats.org/drawingml/2006/main">
+            <a:off x="360000" y="540000"/>
+            <a:ext cx="1080000" cy="1206000"/>
+          </a:xfrm>
+          <a:prstGeom xmlns:a="http://schemas.openxmlformats.org/drawingml/2006/main" prst="rect">
+            <a:avLst/>
+          </a:prstGeom>
+        </p:spPr>
+        <p:txBody>
+          <a:bodyPr xmlns:a="http://schemas.openxmlformats.org/drawingml/2006/main" lIns="28800" tIns="28800" rIns="28800" bIns="28800">
+            <a:noAutofit/>
+          </a:bodyPr>
+          <a:lstStyle xmlns:a="http://schemas.openxmlformats.org/drawingml/2006/main"/>
+          <a:p xmlns:a="http://schemas.openxmlformats.org/drawingml/2006/main">
+            <a:r>
+              <a:rPr lang="en-US" sz="6200">
                 <a:solidFill>
                   <a:srgbClr val="002FA7"/>
                 </a:solidFill>
@@ -1857,27 +2120,29 @@
       </p:sp>
       <p:sp>
         <p:nvSpPr>
-          <p:cNvPr id="100026" name="TextBox 4"/>
-          <p:cNvSpPr txBox="1"/>
-          <p:nvPr/>
-        </p:nvSpPr>
-        <p:spPr>
-          <a:xfrm xmlns:a="http://schemas.openxmlformats.org/drawingml/2006/main">
-            <a:off x="1080000" y="2160000"/>
-            <a:ext cx="7920000" cy="1512000"/>
-          </a:xfrm>
-          <a:prstGeom xmlns:a="http://schemas.openxmlformats.org/drawingml/2006/main" prst="rect">
-            <a:avLst/>
-          </a:prstGeom>
-        </p:spPr>
-        <p:txBody>
-          <a:bodyPr xmlns:a="http://schemas.openxmlformats.org/drawingml/2006/main"/>
-          <a:lstStyle xmlns:a="http://schemas.openxmlformats.org/drawingml/2006/main"/>
-          <a:p xmlns:a="http://schemas.openxmlformats.org/drawingml/2006/main">
-            <a:r>
-              <a:rPr lang="en-US" sz="3800" b="1">
-                <a:solidFill>
-                  <a:srgbClr val="F7F7F2"/>
+          <p:cNvPr id="100033" name="TextBox 5"/>
+          <p:cNvSpPr txBox="1"/>
+          <p:nvPr/>
+        </p:nvSpPr>
+        <p:spPr>
+          <a:xfrm xmlns:a="http://schemas.openxmlformats.org/drawingml/2006/main">
+            <a:off x="864000" y="1800000"/>
+            <a:ext cx="8280000" cy="1746000"/>
+          </a:xfrm>
+          <a:prstGeom xmlns:a="http://schemas.openxmlformats.org/drawingml/2006/main" prst="rect">
+            <a:avLst/>
+          </a:prstGeom>
+        </p:spPr>
+        <p:txBody>
+          <a:bodyPr xmlns:a="http://schemas.openxmlformats.org/drawingml/2006/main" lIns="28800" tIns="28800" rIns="28800" bIns="28800">
+            <a:noAutofit/>
+          </a:bodyPr>
+          <a:lstStyle xmlns:a="http://schemas.openxmlformats.org/drawingml/2006/main"/>
+          <a:p xmlns:a="http://schemas.openxmlformats.org/drawingml/2006/main">
+            <a:r>
+              <a:rPr lang="en-US" sz="3500" b="1">
+                <a:solidFill>
+                  <a:srgbClr val="111111"/>
                 </a:solidFill>
                 <a:latin typeface="Helvetica"/>
                 <a:ea typeface="PingFang SC"/>
@@ -1889,21 +2154,23 @@
       </p:sp>
       <p:sp>
         <p:nvSpPr>
-          <p:cNvPr id="100027" name="TextBox 5"/>
-          <p:cNvSpPr txBox="1"/>
-          <p:nvPr/>
-        </p:nvSpPr>
-        <p:spPr>
-          <a:xfrm xmlns:a="http://schemas.openxmlformats.org/drawingml/2006/main">
-            <a:off x="1080000" y="4320000"/>
-            <a:ext cx="4320000" cy="432000"/>
-          </a:xfrm>
-          <a:prstGeom xmlns:a="http://schemas.openxmlformats.org/drawingml/2006/main" prst="rect">
-            <a:avLst/>
-          </a:prstGeom>
-        </p:spPr>
-        <p:txBody>
-          <a:bodyPr xmlns:a="http://schemas.openxmlformats.org/drawingml/2006/main"/>
+          <p:cNvPr id="100034" name="TextBox 6"/>
+          <p:cNvSpPr txBox="1"/>
+          <p:nvPr/>
+        </p:nvSpPr>
+        <p:spPr>
+          <a:xfrm xmlns:a="http://schemas.openxmlformats.org/drawingml/2006/main">
+            <a:off x="864000" y="4176000"/>
+            <a:ext cx="4320000" cy="342000"/>
+          </a:xfrm>
+          <a:prstGeom xmlns:a="http://schemas.openxmlformats.org/drawingml/2006/main" prst="rect">
+            <a:avLst/>
+          </a:prstGeom>
+        </p:spPr>
+        <p:txBody>
+          <a:bodyPr xmlns:a="http://schemas.openxmlformats.org/drawingml/2006/main" lIns="28800" tIns="28800" rIns="28800" bIns="28800">
+            <a:noAutofit/>
+          </a:bodyPr>
           <a:lstStyle xmlns:a="http://schemas.openxmlformats.org/drawingml/2006/main"/>
           <a:p xmlns:a="http://schemas.openxmlformats.org/drawingml/2006/main">
             <a:r>
@@ -1911,8 +2178,8 @@
                 <a:solidFill>
                   <a:srgbClr val="002FA7"/>
                 </a:solidFill>
-                <a:latin typeface="Helvetica"/>
-                <a:ea typeface="PingFang SC"/>
+                <a:latin typeface="Menlo"/>
+                <a:ea typeface="Menlo"/>
               </a:rPr>
               <a:t>关于协作 · 第一节</a:t>
             </a:r>
